--- a/SDS.pptx
+++ b/SDS.pptx
@@ -10477,10 +10477,10 @@
               <a:tabLst/>
             </a:pPr>
             <a:r>
-              <a:rPr lang="en-US" err="1"/>
-              <a:t>Githup</a:t>
-            </a:r>
-            <a:endParaRPr kumimoji="0" lang="en-US" altLang="en-US" b="0" i="0" u="none" strike="noStrike" cap="none" normalizeH="0" baseline="0">
+              <a:rPr lang="en-US" dirty="0" err="1"/>
+              <a:t>Github</a:t>
+            </a:r>
+            <a:endParaRPr kumimoji="0" lang="en-US" altLang="en-US" b="0" i="0" u="none" strike="noStrike" cap="none" normalizeH="0" baseline="0" dirty="0">
               <a:ln>
                 <a:noFill/>
               </a:ln>

--- a/SDS.pptx
+++ b/SDS.pptx
@@ -5,10 +5,10 @@
     <p:sldMasterId id="2147483648" r:id="rId4"/>
   </p:sldMasterIdLst>
   <p:notesMasterIdLst>
-    <p:notesMasterId r:id="rId18"/>
+    <p:notesMasterId r:id="rId21"/>
   </p:notesMasterIdLst>
   <p:handoutMasterIdLst>
-    <p:handoutMasterId r:id="rId19"/>
+    <p:handoutMasterId r:id="rId22"/>
   </p:handoutMasterIdLst>
   <p:sldIdLst>
     <p:sldId id="256" r:id="rId5"/>
@@ -22,8 +22,11 @@
     <p:sldId id="290" r:id="rId13"/>
     <p:sldId id="301" r:id="rId14"/>
     <p:sldId id="302" r:id="rId15"/>
-    <p:sldId id="304" r:id="rId16"/>
-    <p:sldId id="296" r:id="rId17"/>
+    <p:sldId id="305" r:id="rId16"/>
+    <p:sldId id="304" r:id="rId17"/>
+    <p:sldId id="306" r:id="rId18"/>
+    <p:sldId id="307" r:id="rId19"/>
+    <p:sldId id="296" r:id="rId20"/>
   </p:sldIdLst>
   <p:sldSz cx="12192000" cy="6858000"/>
   <p:notesSz cx="6858000" cy="9144000"/>
@@ -239,7 +242,7 @@
           <a:p>
             <a:fld id="{9D8190EA-5EEC-4300-B6AE-D9734C6C648E}" type="datetimeFigureOut">
               <a:rPr lang="en-US" smtClean="0"/>
-              <a:t>5/10/2025</a:t>
+              <a:t>5/11/2025</a:t>
             </a:fld>
             <a:endParaRPr lang="en-US" dirty="0"/>
           </a:p>
@@ -416,7 +419,7 @@
           <a:p>
             <a:fld id="{7487ADD9-2083-264C-A652-8D52D02F7E72}" type="datetimeFigureOut">
               <a:rPr lang="en-US" smtClean="0"/>
-              <a:t>5/10/2025</a:t>
+              <a:t>5/11/2025</a:t>
             </a:fld>
             <a:endParaRPr lang="en-US" dirty="0"/>
           </a:p>
@@ -1000,7 +1003,7 @@
           <a:p>
             <a:fld id="{F97DC217-DF71-1A49-B3EA-559F1F43B0FF}" type="slidenum">
               <a:rPr lang="en-US" smtClean="0"/>
-              <a:t>12</a:t>
+              <a:t>13</a:t>
             </a:fld>
             <a:endParaRPr lang="en-US" dirty="0"/>
           </a:p>
@@ -1084,7 +1087,7 @@
           <a:p>
             <a:fld id="{F97DC217-DF71-1A49-B3EA-559F1F43B0FF}" type="slidenum">
               <a:rPr lang="en-US" smtClean="0"/>
-              <a:t>13</a:t>
+              <a:t>16</a:t>
             </a:fld>
             <a:endParaRPr lang="en-US" dirty="0"/>
           </a:p>
@@ -10371,6 +10374,69 @@
       </p:grpSpPr>
       <p:sp>
         <p:nvSpPr>
+          <p:cNvPr id="2" name="Title 1">
+            <a:extLst>
+              <a:ext uri="{FF2B5EF4-FFF2-40B4-BE49-F238E27FC236}">
+                <a16:creationId xmlns:a16="http://schemas.microsoft.com/office/drawing/2014/main" id="{93130EEF-8344-EAF6-E050-354F561B066A}"/>
+              </a:ext>
+            </a:extLst>
+          </p:cNvPr>
+          <p:cNvSpPr>
+            <a:spLocks noGrp="1"/>
+          </p:cNvSpPr>
+          <p:nvPr>
+            <p:ph type="ctrTitle"/>
+          </p:nvPr>
+        </p:nvSpPr>
+        <p:spPr>
+          <a:xfrm>
+            <a:off x="913493" y="212593"/>
+            <a:ext cx="8017147" cy="3830130"/>
+          </a:xfrm>
+        </p:spPr>
+        <p:txBody>
+          <a:bodyPr/>
+          <a:lstStyle/>
+          <a:p>
+            <a:r>
+              <a:rPr lang="en-US" dirty="0"/>
+              <a:t>Tech Radar Technology</a:t>
+            </a:r>
+          </a:p>
+        </p:txBody>
+      </p:sp>
+    </p:spTree>
+    <p:extLst>
+      <p:ext uri="{BB962C8B-B14F-4D97-AF65-F5344CB8AC3E}">
+        <p14:creationId xmlns:p14="http://schemas.microsoft.com/office/powerpoint/2010/main" val="4109259797"/>
+      </p:ext>
+    </p:extLst>
+  </p:cSld>
+  <p:clrMapOvr>
+    <a:masterClrMapping/>
+  </p:clrMapOvr>
+</p:sld>
+</file>
+
+<file path=ppt/slides/slide13.xml><?xml version="1.0" encoding="utf-8"?>
+<p:sld xmlns:a="http://schemas.openxmlformats.org/drawingml/2006/main" xmlns:r="http://schemas.openxmlformats.org/officeDocument/2006/relationships" xmlns:p="http://schemas.openxmlformats.org/presentationml/2006/main">
+  <p:cSld>
+    <p:spTree>
+      <p:nvGrpSpPr>
+        <p:cNvPr id="1" name=""/>
+        <p:cNvGrpSpPr/>
+        <p:nvPr/>
+      </p:nvGrpSpPr>
+      <p:grpSpPr>
+        <a:xfrm>
+          <a:off x="0" y="0"/>
+          <a:ext cx="0" cy="0"/>
+          <a:chOff x="0" y="0"/>
+          <a:chExt cx="0" cy="0"/>
+        </a:xfrm>
+      </p:grpSpPr>
+      <p:sp>
+        <p:nvSpPr>
           <p:cNvPr id="6" name="Title 5">
             <a:extLst>
               <a:ext uri="{FF2B5EF4-FFF2-40B4-BE49-F238E27FC236}">
@@ -10399,7 +10465,7 @@
           <a:p>
             <a:r>
               <a:rPr lang="en-US" dirty="0"/>
-              <a:t>Tools – continued </a:t>
+              <a:t>Claude Sonnet </a:t>
             </a:r>
           </a:p>
         </p:txBody>
@@ -10422,8 +10488,8 @@
         </p:nvSpPr>
         <p:spPr bwMode="auto">
           <a:xfrm>
-            <a:off x="1167493" y="2023984"/>
-            <a:ext cx="4663440" cy="3332832"/>
+            <a:off x="1167492" y="1922384"/>
+            <a:ext cx="9520828" cy="3332832"/>
           </a:xfrm>
           <a:extLst>
             <a:ext uri="{909E8E84-426E-40DD-AFC4-6F175D3DCCD1}">
@@ -10459,7 +10525,7 @@
             <a:prstTxWarp prst="textNoShape">
               <a:avLst/>
             </a:prstTxWarp>
-            <a:normAutofit/>
+            <a:noAutofit/>
           </a:bodyPr>
           <a:lstStyle/>
           <a:p>
@@ -10477,10 +10543,54 @@
               <a:tabLst/>
             </a:pPr>
             <a:r>
-              <a:rPr lang="en-US" dirty="0" err="1"/>
-              <a:t>Github</a:t>
-            </a:r>
-            <a:endParaRPr kumimoji="0" lang="en-US" altLang="en-US" b="0" i="0" u="none" strike="noStrike" cap="none" normalizeH="0" baseline="0" dirty="0">
+              <a:rPr kumimoji="0" lang="en-US" altLang="en-US" sz="2800" b="0" i="0" u="none" strike="noStrike" cap="none" normalizeH="0" baseline="0" dirty="0">
+                <a:ln>
+                  <a:noFill/>
+                </a:ln>
+                <a:effectLst/>
+              </a:rPr>
+              <a:t>Claude Sonnet is an advanced language model that excels in coding, writing, analysis and visual processing, refers to a series of advanced AI models in Anthropic’s Claude family, designed as mid-tier models that balance capability and performance. </a:t>
+            </a:r>
+          </a:p>
+          <a:p>
+            <a:pPr marL="0" marR="0" lvl="0" indent="0" defTabSz="914400" rtl="0" eaLnBrk="0" fontAlgn="base" latinLnBrk="0" hangingPunct="0">
+              <a:spcBef>
+                <a:spcPct val="0"/>
+              </a:spcBef>
+              <a:spcAft>
+                <a:spcPts val="600"/>
+              </a:spcAft>
+              <a:buClrTx/>
+              <a:buSzTx/>
+              <a:buFontTx/>
+              <a:buNone/>
+              <a:tabLst/>
+            </a:pPr>
+            <a:r>
+              <a:rPr kumimoji="0" lang="en-US" altLang="en-US" sz="2800" b="0" i="0" u="none" strike="noStrike" cap="none" normalizeH="0" baseline="0" dirty="0">
+                <a:ln>
+                  <a:noFill/>
+                </a:ln>
+                <a:effectLst/>
+              </a:rPr>
+              <a:t>It is among the strongest AI coding assistants available, but it should be used responsibly. It significantly aids productivity, especially in early design and heavy coding tasks, but all outputs should be validated. </a:t>
+            </a:r>
+          </a:p>
+          <a:p>
+            <a:pPr marL="0" marR="0" lvl="0" indent="0" defTabSz="914400" rtl="0" eaLnBrk="0" fontAlgn="base" latinLnBrk="0" hangingPunct="0">
+              <a:spcBef>
+                <a:spcPct val="0"/>
+              </a:spcBef>
+              <a:spcAft>
+                <a:spcPts val="600"/>
+              </a:spcAft>
+              <a:buClrTx/>
+              <a:buSzTx/>
+              <a:buFontTx/>
+              <a:buNone/>
+              <a:tabLst/>
+            </a:pPr>
+            <a:endParaRPr kumimoji="0" lang="en-US" altLang="en-US" sz="2800" b="0" i="0" u="none" strike="noStrike" cap="none" normalizeH="0" baseline="0" dirty="0">
               <a:ln>
                 <a:noFill/>
               </a:ln>
@@ -10489,37 +10599,6 @@
           </a:p>
         </p:txBody>
       </p:sp>
-      <p:pic>
-        <p:nvPicPr>
-          <p:cNvPr id="4" name="Picture 3" descr="A screenshot of a computer&#10;&#10;Description automatically generated">
-            <a:extLst>
-              <a:ext uri="{FF2B5EF4-FFF2-40B4-BE49-F238E27FC236}">
-                <a16:creationId xmlns:a16="http://schemas.microsoft.com/office/drawing/2014/main" id="{E270409B-6666-78FF-D1EC-9F263C86B41B}"/>
-              </a:ext>
-            </a:extLst>
-          </p:cNvPr>
-          <p:cNvPicPr>
-            <a:picLocks noChangeAspect="1"/>
-          </p:cNvPicPr>
-          <p:nvPr/>
-        </p:nvPicPr>
-        <p:blipFill>
-          <a:blip r:embed="rId3"/>
-          <a:stretch>
-            <a:fillRect/>
-          </a:stretch>
-        </p:blipFill>
-        <p:spPr>
-          <a:xfrm>
-            <a:off x="2555385" y="1789897"/>
-            <a:ext cx="8213307" cy="4619983"/>
-          </a:xfrm>
-          <a:prstGeom prst="rect">
-            <a:avLst/>
-          </a:prstGeom>
-          <a:noFill/>
-        </p:spPr>
-      </p:pic>
     </p:spTree>
     <p:extLst>
       <p:ext uri="{BB962C8B-B14F-4D97-AF65-F5344CB8AC3E}">
@@ -10533,7 +10612,227 @@
 </p:sld>
 </file>
 
-<file path=ppt/slides/slide13.xml><?xml version="1.0" encoding="utf-8"?>
+<file path=ppt/slides/slide14.xml><?xml version="1.0" encoding="utf-8"?>
+<p:sld xmlns:a="http://schemas.openxmlformats.org/drawingml/2006/main" xmlns:r="http://schemas.openxmlformats.org/officeDocument/2006/relationships" xmlns:p="http://schemas.openxmlformats.org/presentationml/2006/main">
+  <p:cSld>
+    <p:spTree>
+      <p:nvGrpSpPr>
+        <p:cNvPr id="1" name=""/>
+        <p:cNvGrpSpPr/>
+        <p:nvPr/>
+      </p:nvGrpSpPr>
+      <p:grpSpPr>
+        <a:xfrm>
+          <a:off x="0" y="0"/>
+          <a:ext cx="0" cy="0"/>
+          <a:chOff x="0" y="0"/>
+          <a:chExt cx="0" cy="0"/>
+        </a:xfrm>
+      </p:grpSpPr>
+      <p:sp>
+        <p:nvSpPr>
+          <p:cNvPr id="2" name="Title 1">
+            <a:extLst>
+              <a:ext uri="{FF2B5EF4-FFF2-40B4-BE49-F238E27FC236}">
+                <a16:creationId xmlns:a16="http://schemas.microsoft.com/office/drawing/2014/main" id="{8E7933EB-0838-80DA-4217-6DB1342E81EA}"/>
+              </a:ext>
+            </a:extLst>
+          </p:cNvPr>
+          <p:cNvSpPr>
+            <a:spLocks noGrp="1"/>
+          </p:cNvSpPr>
+          <p:nvPr>
+            <p:ph type="title"/>
+          </p:nvPr>
+        </p:nvSpPr>
+        <p:spPr/>
+        <p:txBody>
+          <a:bodyPr/>
+          <a:lstStyle/>
+          <a:p>
+            <a:r>
+              <a:rPr lang="en-US" dirty="0"/>
+              <a:t>UV</a:t>
+            </a:r>
+          </a:p>
+        </p:txBody>
+      </p:sp>
+      <p:sp>
+        <p:nvSpPr>
+          <p:cNvPr id="3" name="Content Placeholder 2">
+            <a:extLst>
+              <a:ext uri="{FF2B5EF4-FFF2-40B4-BE49-F238E27FC236}">
+                <a16:creationId xmlns:a16="http://schemas.microsoft.com/office/drawing/2014/main" id="{FFE0CA09-CA4E-759E-C6DF-2A35EE63424E}"/>
+              </a:ext>
+            </a:extLst>
+          </p:cNvPr>
+          <p:cNvSpPr>
+            <a:spLocks noGrp="1"/>
+          </p:cNvSpPr>
+          <p:nvPr>
+            <p:ph idx="1"/>
+          </p:nvPr>
+        </p:nvSpPr>
+        <p:spPr/>
+        <p:txBody>
+          <a:bodyPr/>
+          <a:lstStyle/>
+          <a:p>
+            <a:r>
+              <a:rPr lang="en-US" dirty="0" err="1"/>
+              <a:t>Uv</a:t>
+            </a:r>
+            <a:r>
+              <a:rPr lang="en-US" dirty="0"/>
+              <a:t> is a modern and characteristically fast python package manager written in Rust. It is designed to fully replace the default package manger pip, and to significantly enhance Python development.</a:t>
+            </a:r>
+          </a:p>
+          <a:p>
+            <a:r>
+              <a:rPr lang="en-US" dirty="0"/>
+              <a:t>The main selling point of </a:t>
+            </a:r>
+            <a:r>
+              <a:rPr lang="en-US" dirty="0" err="1"/>
+              <a:t>uv</a:t>
+            </a:r>
+            <a:r>
+              <a:rPr lang="en-US" dirty="0"/>
+              <a:t> is speed. On average in benchmark tests, </a:t>
+            </a:r>
+            <a:r>
+              <a:rPr lang="en-US" dirty="0" err="1"/>
+              <a:t>uv</a:t>
+            </a:r>
+            <a:r>
+              <a:rPr lang="en-US" dirty="0"/>
+              <a:t> installs dependencies 10-100x faster than pip. This is due to </a:t>
+            </a:r>
+            <a:r>
+              <a:rPr lang="en-US" dirty="0" err="1"/>
+              <a:t>uv</a:t>
+            </a:r>
+            <a:r>
+              <a:rPr lang="en-US" dirty="0"/>
+              <a:t> utilizing parallel downloading and Rust’s native speed</a:t>
+            </a:r>
+          </a:p>
+        </p:txBody>
+      </p:sp>
+    </p:spTree>
+    <p:extLst>
+      <p:ext uri="{BB962C8B-B14F-4D97-AF65-F5344CB8AC3E}">
+        <p14:creationId xmlns:p14="http://schemas.microsoft.com/office/powerpoint/2010/main" val="3241933047"/>
+      </p:ext>
+    </p:extLst>
+  </p:cSld>
+  <p:clrMapOvr>
+    <a:masterClrMapping/>
+  </p:clrMapOvr>
+</p:sld>
+</file>
+
+<file path=ppt/slides/slide15.xml><?xml version="1.0" encoding="utf-8"?>
+<p:sld xmlns:a="http://schemas.openxmlformats.org/drawingml/2006/main" xmlns:r="http://schemas.openxmlformats.org/officeDocument/2006/relationships" xmlns:p="http://schemas.openxmlformats.org/presentationml/2006/main">
+  <p:cSld>
+    <p:spTree>
+      <p:nvGrpSpPr>
+        <p:cNvPr id="1" name=""/>
+        <p:cNvGrpSpPr/>
+        <p:nvPr/>
+      </p:nvGrpSpPr>
+      <p:grpSpPr>
+        <a:xfrm>
+          <a:off x="0" y="0"/>
+          <a:ext cx="0" cy="0"/>
+          <a:chOff x="0" y="0"/>
+          <a:chExt cx="0" cy="0"/>
+        </a:xfrm>
+      </p:grpSpPr>
+      <p:sp>
+        <p:nvSpPr>
+          <p:cNvPr id="2" name="Title 1">
+            <a:extLst>
+              <a:ext uri="{FF2B5EF4-FFF2-40B4-BE49-F238E27FC236}">
+                <a16:creationId xmlns:a16="http://schemas.microsoft.com/office/drawing/2014/main" id="{03F65CA8-58BB-5641-6D48-5C1AD3482257}"/>
+              </a:ext>
+            </a:extLst>
+          </p:cNvPr>
+          <p:cNvSpPr>
+            <a:spLocks noGrp="1"/>
+          </p:cNvSpPr>
+          <p:nvPr>
+            <p:ph type="title"/>
+          </p:nvPr>
+        </p:nvSpPr>
+        <p:spPr/>
+        <p:txBody>
+          <a:bodyPr/>
+          <a:lstStyle/>
+          <a:p>
+            <a:r>
+              <a:rPr lang="en-US" dirty="0"/>
+              <a:t>JSON Crack</a:t>
+            </a:r>
+          </a:p>
+        </p:txBody>
+      </p:sp>
+      <p:sp>
+        <p:nvSpPr>
+          <p:cNvPr id="3" name="Content Placeholder 2">
+            <a:extLst>
+              <a:ext uri="{FF2B5EF4-FFF2-40B4-BE49-F238E27FC236}">
+                <a16:creationId xmlns:a16="http://schemas.microsoft.com/office/drawing/2014/main" id="{63A32AC1-8288-A916-B193-9E05B81F6E6F}"/>
+              </a:ext>
+            </a:extLst>
+          </p:cNvPr>
+          <p:cNvSpPr>
+            <a:spLocks noGrp="1"/>
+          </p:cNvSpPr>
+          <p:nvPr>
+            <p:ph idx="1"/>
+          </p:nvPr>
+        </p:nvSpPr>
+        <p:spPr>
+          <a:xfrm>
+            <a:off x="1158864" y="2108907"/>
+            <a:ext cx="9779182" cy="3366815"/>
+          </a:xfrm>
+        </p:spPr>
+        <p:txBody>
+          <a:bodyPr>
+            <a:normAutofit lnSpcReduction="10000"/>
+          </a:bodyPr>
+          <a:lstStyle/>
+          <a:p>
+            <a:r>
+              <a:rPr lang="en-US" dirty="0">
+                <a:effectLst/>
+                <a:latin typeface="Calibri" panose="020F0502020204030204" pitchFamily="34" charset="0"/>
+                <a:ea typeface="Calibri" panose="020F0502020204030204" pitchFamily="34" charset="0"/>
+              </a:rPr>
+              <a:t>JSON Crack is an open-source, user-friendly tool designed to visualize and manipulate structured data formats such as JSON, YAML, CSV, XML, and TOML. By transforming complex data into interactive graphs and tree views, it simplifies data exploration and analysis for developers, data analysts, and anyone working with structured datasets. Available as an online editor, a VS Code extension, and a Docker container, JSON Crack has gained significant popularity, boasting over 23.3K GitHub stars and millions of views.</a:t>
+            </a:r>
+          </a:p>
+          <a:p>
+            <a:endParaRPr lang="en-US" dirty="0"/>
+          </a:p>
+        </p:txBody>
+      </p:sp>
+    </p:spTree>
+    <p:extLst>
+      <p:ext uri="{BB962C8B-B14F-4D97-AF65-F5344CB8AC3E}">
+        <p14:creationId xmlns:p14="http://schemas.microsoft.com/office/powerpoint/2010/main" val="3587075545"/>
+      </p:ext>
+    </p:extLst>
+  </p:cSld>
+  <p:clrMapOvr>
+    <a:masterClrMapping/>
+  </p:clrMapOvr>
+</p:sld>
+</file>
+
+<file path=ppt/slides/slide16.xml><?xml version="1.0" encoding="utf-8"?>
 <p:sld xmlns:a="http://schemas.openxmlformats.org/drawingml/2006/main" xmlns:r="http://schemas.openxmlformats.org/officeDocument/2006/relationships" xmlns:p="http://schemas.openxmlformats.org/presentationml/2006/main">
   <p:cSld>
     <p:spTree>
@@ -10937,7 +11236,7 @@
         </p:blipFill>
         <p:spPr>
           <a:xfrm>
-            <a:off x="7049731" y="464575"/>
+            <a:off x="5661086" y="464575"/>
             <a:ext cx="4728148" cy="5928850"/>
           </a:xfrm>
           <a:prstGeom prst="rect">
@@ -11064,48 +11363,6 @@
           <a:chExt cx="0" cy="0"/>
         </a:xfrm>
       </p:grpSpPr>
-      <p:sp>
-        <p:nvSpPr>
-          <p:cNvPr id="2" name="Title 1">
-            <a:extLst>
-              <a:ext uri="{FF2B5EF4-FFF2-40B4-BE49-F238E27FC236}">
-                <a16:creationId xmlns:a16="http://schemas.microsoft.com/office/drawing/2014/main" id="{6F148DD4-4828-CE87-0C5C-42BE175E8DA5}"/>
-              </a:ext>
-            </a:extLst>
-          </p:cNvPr>
-          <p:cNvSpPr>
-            <a:spLocks noGrp="1"/>
-          </p:cNvSpPr>
-          <p:nvPr>
-            <p:ph type="title"/>
-          </p:nvPr>
-        </p:nvSpPr>
-        <p:spPr>
-          <a:xfrm>
-            <a:off x="0" y="550607"/>
-            <a:ext cx="5919019" cy="941869"/>
-          </a:xfrm>
-        </p:spPr>
-        <p:txBody>
-          <a:bodyPr anchor="b">
-            <a:normAutofit/>
-          </a:bodyPr>
-          <a:lstStyle/>
-          <a:p>
-            <a:pPr marL="571500" indent="-571500">
-              <a:buFont typeface="Arial" panose="020B0604020202020204" pitchFamily="34" charset="0"/>
-              <a:buChar char="•"/>
-            </a:pPr>
-            <a:r>
-              <a:rPr lang="en-US" dirty="0">
-                <a:effectLst/>
-              </a:rPr>
-              <a:t>Class Diagram </a:t>
-            </a:r>
-            <a:endParaRPr lang="en-US" dirty="0"/>
-          </a:p>
-        </p:txBody>
-      </p:sp>
       <p:pic>
         <p:nvPicPr>
           <p:cNvPr id="3" name="Picture 2" descr="A diagram of a company&#10;&#10;AI-generated content may be incorrect.">
@@ -11134,7 +11391,7 @@
         </p:blipFill>
         <p:spPr>
           <a:xfrm>
-            <a:off x="5389921" y="344671"/>
+            <a:off x="4262161" y="521652"/>
             <a:ext cx="6210300" cy="5814695"/>
           </a:xfrm>
           <a:prstGeom prst="rect">
@@ -11142,6 +11399,48 @@
           </a:prstGeom>
         </p:spPr>
       </p:pic>
+      <p:sp>
+        <p:nvSpPr>
+          <p:cNvPr id="2" name="Title 1">
+            <a:extLst>
+              <a:ext uri="{FF2B5EF4-FFF2-40B4-BE49-F238E27FC236}">
+                <a16:creationId xmlns:a16="http://schemas.microsoft.com/office/drawing/2014/main" id="{6F148DD4-4828-CE87-0C5C-42BE175E8DA5}"/>
+              </a:ext>
+            </a:extLst>
+          </p:cNvPr>
+          <p:cNvSpPr>
+            <a:spLocks noGrp="1"/>
+          </p:cNvSpPr>
+          <p:nvPr>
+            <p:ph type="title"/>
+          </p:nvPr>
+        </p:nvSpPr>
+        <p:spPr>
+          <a:xfrm>
+            <a:off x="0" y="550607"/>
+            <a:ext cx="5919019" cy="941869"/>
+          </a:xfrm>
+        </p:spPr>
+        <p:txBody>
+          <a:bodyPr anchor="b">
+            <a:normAutofit/>
+          </a:bodyPr>
+          <a:lstStyle/>
+          <a:p>
+            <a:pPr marL="571500" indent="-571500">
+              <a:buFont typeface="Arial" panose="020B0604020202020204" pitchFamily="34" charset="0"/>
+              <a:buChar char="•"/>
+            </a:pPr>
+            <a:r>
+              <a:rPr lang="en-US" dirty="0">
+                <a:effectLst/>
+              </a:rPr>
+              <a:t>Class Diagram </a:t>
+            </a:r>
+            <a:endParaRPr lang="en-US" dirty="0"/>
+          </a:p>
+        </p:txBody>
+      </p:sp>
       <p:sp>
         <p:nvSpPr>
           <p:cNvPr id="9" name="TextBox 8">
@@ -12816,7 +13115,7 @@
         </p:blipFill>
         <p:spPr>
           <a:xfrm>
-            <a:off x="5748398" y="1440857"/>
+            <a:off x="5281038" y="1420537"/>
             <a:ext cx="6063615" cy="3693160"/>
           </a:xfrm>
           <a:prstGeom prst="rect">
@@ -13977,12 +14276,23 @@
 </file>
 
 <file path=customXml/item1.xml><?xml version="1.0" encoding="utf-8"?>
-<?mso-contentType ?>
-<FormTemplates xmlns="http://schemas.microsoft.com/sharepoint/v3/contenttype/forms">
-  <Display>DocumentLibraryForm</Display>
-  <Edit>DocumentLibraryForm</Edit>
-  <New>DocumentLibraryForm</New>
-</FormTemplates>
+<p:properties xmlns:p="http://schemas.microsoft.com/office/2006/metadata/properties" xmlns:xsi="http://www.w3.org/2001/XMLSchema-instance" xmlns:pc="http://schemas.microsoft.com/office/infopath/2007/PartnerControls">
+  <documentManagement>
+    <_ip_UnifiedCompliancePolicyUIAction xmlns="http://schemas.microsoft.com/sharepoint/v3" xsi:nil="true"/>
+    <Image xmlns="71af3243-3dd4-4a8d-8c0d-dd76da1f02a5">
+      <Url xsi:nil="true"/>
+      <Description xsi:nil="true"/>
+    </Image>
+    <Status xmlns="71af3243-3dd4-4a8d-8c0d-dd76da1f02a5">Not started</Status>
+    <Background xmlns="71af3243-3dd4-4a8d-8c0d-dd76da1f02a5">false</Background>
+    <_ip_UnifiedCompliancePolicyProperties xmlns="http://schemas.microsoft.com/sharepoint/v3" xsi:nil="true"/>
+    <ImageTagsTaxHTField xmlns="71af3243-3dd4-4a8d-8c0d-dd76da1f02a5">
+      <Terms xmlns="http://schemas.microsoft.com/office/infopath/2007/PartnerControls"/>
+    </ImageTagsTaxHTField>
+    <TaxCatchAll xmlns="230e9df3-be65-4c73-a93b-d1236ebd677e" xsi:nil="true"/>
+    <MediaServiceKeyPoints xmlns="71af3243-3dd4-4a8d-8c0d-dd76da1f02a5" xsi:nil="true"/>
+  </documentManagement>
+</p:properties>
 </file>
 
 <file path=customXml/item2.xml><?xml version="1.0" encoding="utf-8"?>
@@ -14298,29 +14608,22 @@
 </file>
 
 <file path=customXml/item3.xml><?xml version="1.0" encoding="utf-8"?>
-<p:properties xmlns:p="http://schemas.microsoft.com/office/2006/metadata/properties" xmlns:xsi="http://www.w3.org/2001/XMLSchema-instance" xmlns:pc="http://schemas.microsoft.com/office/infopath/2007/PartnerControls">
-  <documentManagement>
-    <_ip_UnifiedCompliancePolicyUIAction xmlns="http://schemas.microsoft.com/sharepoint/v3" xsi:nil="true"/>
-    <Image xmlns="71af3243-3dd4-4a8d-8c0d-dd76da1f02a5">
-      <Url xsi:nil="true"/>
-      <Description xsi:nil="true"/>
-    </Image>
-    <Status xmlns="71af3243-3dd4-4a8d-8c0d-dd76da1f02a5">Not started</Status>
-    <Background xmlns="71af3243-3dd4-4a8d-8c0d-dd76da1f02a5">false</Background>
-    <_ip_UnifiedCompliancePolicyProperties xmlns="http://schemas.microsoft.com/sharepoint/v3" xsi:nil="true"/>
-    <ImageTagsTaxHTField xmlns="71af3243-3dd4-4a8d-8c0d-dd76da1f02a5">
-      <Terms xmlns="http://schemas.microsoft.com/office/infopath/2007/PartnerControls"/>
-    </ImageTagsTaxHTField>
-    <TaxCatchAll xmlns="230e9df3-be65-4c73-a93b-d1236ebd677e" xsi:nil="true"/>
-    <MediaServiceKeyPoints xmlns="71af3243-3dd4-4a8d-8c0d-dd76da1f02a5" xsi:nil="true"/>
-  </documentManagement>
-</p:properties>
+<?mso-contentType ?>
+<FormTemplates xmlns="http://schemas.microsoft.com/sharepoint/v3/contenttype/forms">
+  <Display>DocumentLibraryForm</Display>
+  <Edit>DocumentLibraryForm</Edit>
+  <New>DocumentLibraryForm</New>
+</FormTemplates>
 </file>
 
 <file path=customXml/itemProps1.xml><?xml version="1.0" encoding="utf-8"?>
-<ds:datastoreItem xmlns:ds="http://schemas.openxmlformats.org/officeDocument/2006/customXml" ds:itemID="{45A8381C-73EB-48EA-B45F-7B7C8C7DF409}">
+<ds:datastoreItem xmlns:ds="http://schemas.openxmlformats.org/officeDocument/2006/customXml" ds:itemID="{61E98C35-9ECE-4425-BCBA-00E118C705CE}">
   <ds:schemaRefs>
-    <ds:schemaRef ds:uri="http://schemas.microsoft.com/sharepoint/v3/contenttype/forms"/>
+    <ds:schemaRef ds:uri="http://schemas.microsoft.com/office/2006/metadata/properties"/>
+    <ds:schemaRef ds:uri="http://schemas.microsoft.com/office/infopath/2007/PartnerControls"/>
+    <ds:schemaRef ds:uri="http://schemas.microsoft.com/sharepoint/v3"/>
+    <ds:schemaRef ds:uri="71af3243-3dd4-4a8d-8c0d-dd76da1f02a5"/>
+    <ds:schemaRef ds:uri="230e9df3-be65-4c73-a93b-d1236ebd677e"/>
   </ds:schemaRefs>
 </ds:datastoreItem>
 </file>
@@ -14347,13 +14650,9 @@
 </file>
 
 <file path=customXml/itemProps3.xml><?xml version="1.0" encoding="utf-8"?>
-<ds:datastoreItem xmlns:ds="http://schemas.openxmlformats.org/officeDocument/2006/customXml" ds:itemID="{61E98C35-9ECE-4425-BCBA-00E118C705CE}">
+<ds:datastoreItem xmlns:ds="http://schemas.openxmlformats.org/officeDocument/2006/customXml" ds:itemID="{45A8381C-73EB-48EA-B45F-7B7C8C7DF409}">
   <ds:schemaRefs>
-    <ds:schemaRef ds:uri="http://schemas.microsoft.com/office/2006/metadata/properties"/>
-    <ds:schemaRef ds:uri="http://schemas.microsoft.com/office/infopath/2007/PartnerControls"/>
-    <ds:schemaRef ds:uri="http://schemas.microsoft.com/sharepoint/v3"/>
-    <ds:schemaRef ds:uri="71af3243-3dd4-4a8d-8c0d-dd76da1f02a5"/>
-    <ds:schemaRef ds:uri="230e9df3-be65-4c73-a93b-d1236ebd677e"/>
+    <ds:schemaRef ds:uri="http://schemas.microsoft.com/sharepoint/v3/contenttype/forms"/>
   </ds:schemaRefs>
 </ds:datastoreItem>
 </file>

--- a/SDS.pptx
+++ b/SDS.pptx
@@ -5,10 +5,10 @@
     <p:sldMasterId id="2147483648" r:id="rId4"/>
   </p:sldMasterIdLst>
   <p:notesMasterIdLst>
-    <p:notesMasterId r:id="rId21"/>
+    <p:notesMasterId r:id="rId24"/>
   </p:notesMasterIdLst>
   <p:handoutMasterIdLst>
-    <p:handoutMasterId r:id="rId22"/>
+    <p:handoutMasterId r:id="rId25"/>
   </p:handoutMasterIdLst>
   <p:sldIdLst>
     <p:sldId id="256" r:id="rId5"/>
@@ -18,15 +18,18 @@
     <p:sldId id="303" r:id="rId9"/>
     <p:sldId id="291" r:id="rId10"/>
     <p:sldId id="289" r:id="rId11"/>
-    <p:sldId id="300" r:id="rId12"/>
-    <p:sldId id="290" r:id="rId13"/>
-    <p:sldId id="301" r:id="rId14"/>
-    <p:sldId id="302" r:id="rId15"/>
-    <p:sldId id="305" r:id="rId16"/>
-    <p:sldId id="304" r:id="rId17"/>
-    <p:sldId id="306" r:id="rId18"/>
-    <p:sldId id="307" r:id="rId19"/>
-    <p:sldId id="296" r:id="rId20"/>
+    <p:sldId id="310" r:id="rId12"/>
+    <p:sldId id="300" r:id="rId13"/>
+    <p:sldId id="290" r:id="rId14"/>
+    <p:sldId id="301" r:id="rId15"/>
+    <p:sldId id="313" r:id="rId16"/>
+    <p:sldId id="315" r:id="rId17"/>
+    <p:sldId id="314" r:id="rId18"/>
+    <p:sldId id="305" r:id="rId19"/>
+    <p:sldId id="304" r:id="rId20"/>
+    <p:sldId id="306" r:id="rId21"/>
+    <p:sldId id="307" r:id="rId22"/>
+    <p:sldId id="296" r:id="rId23"/>
   </p:sldIdLst>
   <p:sldSz cx="12192000" cy="6858000"/>
   <p:notesSz cx="6858000" cy="9144000"/>
@@ -835,7 +838,7 @@
           <a:p>
             <a:fld id="{F97DC217-DF71-1A49-B3EA-559F1F43B0FF}" type="slidenum">
               <a:rPr lang="en-US" smtClean="0"/>
-              <a:t>10</a:t>
+              <a:t>11</a:t>
             </a:fld>
             <a:endParaRPr lang="en-US" dirty="0"/>
           </a:p>
@@ -919,7 +922,7 @@
           <a:p>
             <a:fld id="{F97DC217-DF71-1A49-B3EA-559F1F43B0FF}" type="slidenum">
               <a:rPr lang="en-US" smtClean="0"/>
-              <a:t>11</a:t>
+              <a:t>16</a:t>
             </a:fld>
             <a:endParaRPr lang="en-US" dirty="0"/>
           </a:p>
@@ -928,7 +931,7 @@
     </p:spTree>
     <p:extLst>
       <p:ext uri="{BB962C8B-B14F-4D97-AF65-F5344CB8AC3E}">
-        <p14:creationId xmlns:p14="http://schemas.microsoft.com/office/powerpoint/2010/main" val="821221030"/>
+        <p14:creationId xmlns:p14="http://schemas.microsoft.com/office/powerpoint/2010/main" val="3779112914"/>
       </p:ext>
     </p:extLst>
   </p:cSld>
@@ -1003,91 +1006,7 @@
           <a:p>
             <a:fld id="{F97DC217-DF71-1A49-B3EA-559F1F43B0FF}" type="slidenum">
               <a:rPr lang="en-US" smtClean="0"/>
-              <a:t>13</a:t>
-            </a:fld>
-            <a:endParaRPr lang="en-US" dirty="0"/>
-          </a:p>
-        </p:txBody>
-      </p:sp>
-    </p:spTree>
-    <p:extLst>
-      <p:ext uri="{BB962C8B-B14F-4D97-AF65-F5344CB8AC3E}">
-        <p14:creationId xmlns:p14="http://schemas.microsoft.com/office/powerpoint/2010/main" val="3779112914"/>
-      </p:ext>
-    </p:extLst>
-  </p:cSld>
-  <p:clrMapOvr>
-    <a:masterClrMapping/>
-  </p:clrMapOvr>
-</p:notes>
-</file>
-
-<file path=ppt/notesSlides/notesSlide13.xml><?xml version="1.0" encoding="utf-8"?>
-<p:notes xmlns:a="http://schemas.openxmlformats.org/drawingml/2006/main" xmlns:r="http://schemas.openxmlformats.org/officeDocument/2006/relationships" xmlns:p="http://schemas.openxmlformats.org/presentationml/2006/main">
-  <p:cSld>
-    <p:spTree>
-      <p:nvGrpSpPr>
-        <p:cNvPr id="1" name=""/>
-        <p:cNvGrpSpPr/>
-        <p:nvPr/>
-      </p:nvGrpSpPr>
-      <p:grpSpPr>
-        <a:xfrm>
-          <a:off x="0" y="0"/>
-          <a:ext cx="0" cy="0"/>
-          <a:chOff x="0" y="0"/>
-          <a:chExt cx="0" cy="0"/>
-        </a:xfrm>
-      </p:grpSpPr>
-      <p:sp>
-        <p:nvSpPr>
-          <p:cNvPr id="2" name="Slide Image Placeholder 1"/>
-          <p:cNvSpPr>
-            <a:spLocks noGrp="1" noRot="1" noChangeAspect="1"/>
-          </p:cNvSpPr>
-          <p:nvPr>
-            <p:ph type="sldImg"/>
-          </p:nvPr>
-        </p:nvSpPr>
-        <p:spPr/>
-      </p:sp>
-      <p:sp>
-        <p:nvSpPr>
-          <p:cNvPr id="3" name="Notes Placeholder 2"/>
-          <p:cNvSpPr>
-            <a:spLocks noGrp="1"/>
-          </p:cNvSpPr>
-          <p:nvPr>
-            <p:ph type="body" idx="1"/>
-          </p:nvPr>
-        </p:nvSpPr>
-        <p:spPr/>
-        <p:txBody>
-          <a:bodyPr/>
-          <a:lstStyle/>
-          <a:p>
-            <a:endParaRPr lang="en-US" dirty="0"/>
-          </a:p>
-        </p:txBody>
-      </p:sp>
-      <p:sp>
-        <p:nvSpPr>
-          <p:cNvPr id="4" name="Slide Number Placeholder 3"/>
-          <p:cNvSpPr>
-            <a:spLocks noGrp="1"/>
-          </p:cNvSpPr>
-          <p:nvPr>
-            <p:ph type="sldNum" sz="quarter" idx="5"/>
-          </p:nvPr>
-        </p:nvSpPr>
-        <p:spPr/>
-        <p:txBody>
-          <a:bodyPr/>
-          <a:lstStyle/>
-          <a:p>
-            <a:fld id="{F97DC217-DF71-1A49-B3EA-559F1F43B0FF}" type="slidenum">
-              <a:rPr lang="en-US" smtClean="0"/>
-              <a:t>16</a:t>
+              <a:t>19</a:t>
             </a:fld>
             <a:endParaRPr lang="en-US" dirty="0"/>
           </a:p>
@@ -1675,7 +1594,7 @@
           <a:p>
             <a:fld id="{F97DC217-DF71-1A49-B3EA-559F1F43B0FF}" type="slidenum">
               <a:rPr lang="en-US" smtClean="0"/>
-              <a:t>8</a:t>
+              <a:t>9</a:t>
             </a:fld>
             <a:endParaRPr lang="en-US" dirty="0"/>
           </a:p>
@@ -1759,7 +1678,7 @@
           <a:p>
             <a:fld id="{F97DC217-DF71-1A49-B3EA-559F1F43B0FF}" type="slidenum">
               <a:rPr lang="en-US" smtClean="0"/>
-              <a:t>9</a:t>
+              <a:t>10</a:t>
             </a:fld>
             <a:endParaRPr lang="en-US" dirty="0"/>
           </a:p>
@@ -3614,872 +3533,6 @@
 </file>
 
 <file path=ppt/slideLayouts/slideLayout3.xml><?xml version="1.0" encoding="utf-8"?>
-<p:sldLayout xmlns:a="http://schemas.openxmlformats.org/drawingml/2006/main" xmlns:r="http://schemas.openxmlformats.org/officeDocument/2006/relationships" xmlns:p="http://schemas.openxmlformats.org/presentationml/2006/main" userDrawn="1">
-  <p:cSld name="Title and Right Image">
-    <p:spTree>
-      <p:nvGrpSpPr>
-        <p:cNvPr id="1" name=""/>
-        <p:cNvGrpSpPr/>
-        <p:nvPr/>
-      </p:nvGrpSpPr>
-      <p:grpSpPr>
-        <a:xfrm>
-          <a:off x="0" y="0"/>
-          <a:ext cx="0" cy="0"/>
-          <a:chOff x="0" y="0"/>
-          <a:chExt cx="0" cy="0"/>
-        </a:xfrm>
-      </p:grpSpPr>
-      <p:grpSp>
-        <p:nvGrpSpPr>
-          <p:cNvPr id="13" name="Group 12">
-            <a:extLst>
-              <a:ext uri="{FF2B5EF4-FFF2-40B4-BE49-F238E27FC236}">
-                <a16:creationId xmlns:a16="http://schemas.microsoft.com/office/drawing/2014/main" id="{AC10D125-AB73-D276-4947-94204736A30D}"/>
-              </a:ext>
-              <a:ext uri="{C183D7F6-B498-43B3-948B-1728B52AA6E4}">
-                <adec:decorative xmlns:adec="http://schemas.microsoft.com/office/drawing/2017/decorative" val="1"/>
-              </a:ext>
-            </a:extLst>
-          </p:cNvPr>
-          <p:cNvGrpSpPr/>
-          <p:nvPr userDrawn="1"/>
-        </p:nvGrpSpPr>
-        <p:grpSpPr>
-          <a:xfrm flipH="1">
-            <a:off x="1" y="0"/>
-            <a:ext cx="12191999" cy="6858000"/>
-            <a:chOff x="1" y="0"/>
-            <a:chExt cx="12191999" cy="6858000"/>
-          </a:xfrm>
-        </p:grpSpPr>
-        <p:sp>
-          <p:nvSpPr>
-            <p:cNvPr id="4" name="Freeform 3">
-              <a:extLst>
-                <a:ext uri="{FF2B5EF4-FFF2-40B4-BE49-F238E27FC236}">
-                  <a16:creationId xmlns:a16="http://schemas.microsoft.com/office/drawing/2014/main" id="{6A7F6A3F-E1DD-A246-9A6D-5F9B18BA2588}"/>
-                </a:ext>
-                <a:ext uri="{C183D7F6-B498-43B3-948B-1728B52AA6E4}">
-                  <adec:decorative xmlns:adec="http://schemas.microsoft.com/office/drawing/2017/decorative" val="1"/>
-                </a:ext>
-              </a:extLst>
-            </p:cNvPr>
-            <p:cNvSpPr/>
-            <p:nvPr userDrawn="1"/>
-          </p:nvSpPr>
-          <p:spPr>
-            <a:xfrm flipH="1">
-              <a:off x="8580896" y="1"/>
-              <a:ext cx="3611104" cy="3611104"/>
-            </a:xfrm>
-            <a:custGeom>
-              <a:avLst/>
-              <a:gdLst>
-                <a:gd name="connsiteX0" fmla="*/ 0 w 1167493"/>
-                <a:gd name="connsiteY0" fmla="*/ 0 h 1167493"/>
-                <a:gd name="connsiteX1" fmla="*/ 1167493 w 1167493"/>
-                <a:gd name="connsiteY1" fmla="*/ 0 h 1167493"/>
-                <a:gd name="connsiteX2" fmla="*/ 0 w 1167493"/>
-                <a:gd name="connsiteY2" fmla="*/ 1167493 h 1167493"/>
-                <a:gd name="connsiteX3" fmla="*/ 0 w 1167493"/>
-                <a:gd name="connsiteY3" fmla="*/ 0 h 1167493"/>
-              </a:gdLst>
-              <a:ahLst/>
-              <a:cxnLst>
-                <a:cxn ang="0">
-                  <a:pos x="connsiteX0" y="connsiteY0"/>
-                </a:cxn>
-                <a:cxn ang="0">
-                  <a:pos x="connsiteX1" y="connsiteY1"/>
-                </a:cxn>
-                <a:cxn ang="0">
-                  <a:pos x="connsiteX2" y="connsiteY2"/>
-                </a:cxn>
-                <a:cxn ang="0">
-                  <a:pos x="connsiteX3" y="connsiteY3"/>
-                </a:cxn>
-              </a:cxnLst>
-              <a:rect l="l" t="t" r="r" b="b"/>
-              <a:pathLst>
-                <a:path w="1167493" h="1167493">
-                  <a:moveTo>
-                    <a:pt x="0" y="0"/>
-                  </a:moveTo>
-                  <a:lnTo>
-                    <a:pt x="1167493" y="0"/>
-                  </a:lnTo>
-                  <a:cubicBezTo>
-                    <a:pt x="522704" y="0"/>
-                    <a:pt x="0" y="522704"/>
-                    <a:pt x="0" y="1167493"/>
-                  </a:cubicBezTo>
-                  <a:lnTo>
-                    <a:pt x="0" y="0"/>
-                  </a:lnTo>
-                  <a:close/>
-                </a:path>
-              </a:pathLst>
-            </a:custGeom>
-            <a:solidFill>
-              <a:schemeClr val="accent1"/>
-            </a:solidFill>
-            <a:ln>
-              <a:noFill/>
-            </a:ln>
-          </p:spPr>
-          <p:style>
-            <a:lnRef idx="2">
-              <a:schemeClr val="accent1">
-                <a:shade val="50000"/>
-              </a:schemeClr>
-            </a:lnRef>
-            <a:fillRef idx="1">
-              <a:schemeClr val="accent1"/>
-            </a:fillRef>
-            <a:effectRef idx="0">
-              <a:schemeClr val="accent1"/>
-            </a:effectRef>
-            <a:fontRef idx="minor">
-              <a:schemeClr val="lt1"/>
-            </a:fontRef>
-          </p:style>
-          <p:txBody>
-            <a:bodyPr wrap="square" rtlCol="0" anchor="ctr">
-              <a:noAutofit/>
-            </a:bodyPr>
-            <a:lstStyle/>
-            <a:p>
-              <a:pPr algn="ctr"/>
-              <a:endParaRPr lang="en-US" dirty="0"/>
-            </a:p>
-          </p:txBody>
-        </p:sp>
-        <p:sp>
-          <p:nvSpPr>
-            <p:cNvPr id="5" name="Freeform 4">
-              <a:extLst>
-                <a:ext uri="{FF2B5EF4-FFF2-40B4-BE49-F238E27FC236}">
-                  <a16:creationId xmlns:a16="http://schemas.microsoft.com/office/drawing/2014/main" id="{055FD0FC-C8FF-6741-A364-A29CDC6F9495}"/>
-                </a:ext>
-                <a:ext uri="{C183D7F6-B498-43B3-948B-1728B52AA6E4}">
-                  <adec:decorative xmlns:adec="http://schemas.microsoft.com/office/drawing/2017/decorative" val="1"/>
-                </a:ext>
-              </a:extLst>
-            </p:cNvPr>
-            <p:cNvSpPr/>
-            <p:nvPr userDrawn="1"/>
-          </p:nvSpPr>
-          <p:spPr>
-            <a:xfrm flipH="1">
-              <a:off x="8580896" y="3246896"/>
-              <a:ext cx="3611104" cy="3611104"/>
-            </a:xfrm>
-            <a:custGeom>
-              <a:avLst/>
-              <a:gdLst>
-                <a:gd name="connsiteX0" fmla="*/ 0 w 1167493"/>
-                <a:gd name="connsiteY0" fmla="*/ 0 h 1167493"/>
-                <a:gd name="connsiteX1" fmla="*/ 1167493 w 1167493"/>
-                <a:gd name="connsiteY1" fmla="*/ 1167493 h 1167493"/>
-                <a:gd name="connsiteX2" fmla="*/ 0 w 1167493"/>
-                <a:gd name="connsiteY2" fmla="*/ 1167493 h 1167493"/>
-                <a:gd name="connsiteX3" fmla="*/ 0 w 1167493"/>
-                <a:gd name="connsiteY3" fmla="*/ 0 h 1167493"/>
-              </a:gdLst>
-              <a:ahLst/>
-              <a:cxnLst>
-                <a:cxn ang="0">
-                  <a:pos x="connsiteX0" y="connsiteY0"/>
-                </a:cxn>
-                <a:cxn ang="0">
-                  <a:pos x="connsiteX1" y="connsiteY1"/>
-                </a:cxn>
-                <a:cxn ang="0">
-                  <a:pos x="connsiteX2" y="connsiteY2"/>
-                </a:cxn>
-                <a:cxn ang="0">
-                  <a:pos x="connsiteX3" y="connsiteY3"/>
-                </a:cxn>
-              </a:cxnLst>
-              <a:rect l="l" t="t" r="r" b="b"/>
-              <a:pathLst>
-                <a:path w="1167493" h="1167493">
-                  <a:moveTo>
-                    <a:pt x="0" y="0"/>
-                  </a:moveTo>
-                  <a:cubicBezTo>
-                    <a:pt x="0" y="644789"/>
-                    <a:pt x="522704" y="1167493"/>
-                    <a:pt x="1167493" y="1167493"/>
-                  </a:cubicBezTo>
-                  <a:lnTo>
-                    <a:pt x="0" y="1167493"/>
-                  </a:lnTo>
-                  <a:lnTo>
-                    <a:pt x="0" y="0"/>
-                  </a:lnTo>
-                  <a:close/>
-                </a:path>
-              </a:pathLst>
-            </a:custGeom>
-            <a:solidFill>
-              <a:schemeClr val="accent1"/>
-            </a:solidFill>
-            <a:ln>
-              <a:noFill/>
-            </a:ln>
-          </p:spPr>
-          <p:style>
-            <a:lnRef idx="2">
-              <a:schemeClr val="accent1">
-                <a:shade val="50000"/>
-              </a:schemeClr>
-            </a:lnRef>
-            <a:fillRef idx="1">
-              <a:schemeClr val="accent1"/>
-            </a:fillRef>
-            <a:effectRef idx="0">
-              <a:schemeClr val="accent1"/>
-            </a:effectRef>
-            <a:fontRef idx="minor">
-              <a:schemeClr val="lt1"/>
-            </a:fontRef>
-          </p:style>
-          <p:txBody>
-            <a:bodyPr wrap="square" rtlCol="0" anchor="ctr">
-              <a:noAutofit/>
-            </a:bodyPr>
-            <a:lstStyle/>
-            <a:p>
-              <a:pPr algn="ctr"/>
-              <a:endParaRPr lang="en-US" dirty="0">
-                <a:latin typeface="+mn-lt"/>
-              </a:endParaRPr>
-            </a:p>
-          </p:txBody>
-        </p:sp>
-        <p:sp>
-          <p:nvSpPr>
-            <p:cNvPr id="6" name="Freeform 5">
-              <a:extLst>
-                <a:ext uri="{FF2B5EF4-FFF2-40B4-BE49-F238E27FC236}">
-                  <a16:creationId xmlns:a16="http://schemas.microsoft.com/office/drawing/2014/main" id="{D11C9832-A021-954E-A34F-2988D1189AE9}"/>
-                </a:ext>
-                <a:ext uri="{C183D7F6-B498-43B3-948B-1728B52AA6E4}">
-                  <adec:decorative xmlns:adec="http://schemas.microsoft.com/office/drawing/2017/decorative" val="1"/>
-                </a:ext>
-              </a:extLst>
-            </p:cNvPr>
-            <p:cNvSpPr/>
-            <p:nvPr userDrawn="1"/>
-          </p:nvSpPr>
-          <p:spPr>
-            <a:xfrm>
-              <a:off x="1" y="0"/>
-              <a:ext cx="933856" cy="933856"/>
-            </a:xfrm>
-            <a:custGeom>
-              <a:avLst/>
-              <a:gdLst>
-                <a:gd name="connsiteX0" fmla="*/ 0 w 862693"/>
-                <a:gd name="connsiteY0" fmla="*/ 0 h 862693"/>
-                <a:gd name="connsiteX1" fmla="*/ 862693 w 862693"/>
-                <a:gd name="connsiteY1" fmla="*/ 0 h 862693"/>
-                <a:gd name="connsiteX2" fmla="*/ 0 w 862693"/>
-                <a:gd name="connsiteY2" fmla="*/ 862693 h 862693"/>
-                <a:gd name="connsiteX3" fmla="*/ 0 w 862693"/>
-                <a:gd name="connsiteY3" fmla="*/ 0 h 862693"/>
-              </a:gdLst>
-              <a:ahLst/>
-              <a:cxnLst>
-                <a:cxn ang="0">
-                  <a:pos x="connsiteX0" y="connsiteY0"/>
-                </a:cxn>
-                <a:cxn ang="0">
-                  <a:pos x="connsiteX1" y="connsiteY1"/>
-                </a:cxn>
-                <a:cxn ang="0">
-                  <a:pos x="connsiteX2" y="connsiteY2"/>
-                </a:cxn>
-                <a:cxn ang="0">
-                  <a:pos x="connsiteX3" y="connsiteY3"/>
-                </a:cxn>
-              </a:cxnLst>
-              <a:rect l="l" t="t" r="r" b="b"/>
-              <a:pathLst>
-                <a:path w="862693" h="862693">
-                  <a:moveTo>
-                    <a:pt x="0" y="0"/>
-                  </a:moveTo>
-                  <a:lnTo>
-                    <a:pt x="862693" y="0"/>
-                  </a:lnTo>
-                  <a:cubicBezTo>
-                    <a:pt x="862693" y="476453"/>
-                    <a:pt x="476452" y="862693"/>
-                    <a:pt x="0" y="862693"/>
-                  </a:cubicBezTo>
-                  <a:lnTo>
-                    <a:pt x="0" y="0"/>
-                  </a:lnTo>
-                  <a:close/>
-                </a:path>
-              </a:pathLst>
-            </a:custGeom>
-            <a:solidFill>
-              <a:schemeClr val="accent3"/>
-            </a:solidFill>
-            <a:ln>
-              <a:noFill/>
-            </a:ln>
-          </p:spPr>
-          <p:style>
-            <a:lnRef idx="2">
-              <a:schemeClr val="accent1">
-                <a:shade val="50000"/>
-              </a:schemeClr>
-            </a:lnRef>
-            <a:fillRef idx="1">
-              <a:schemeClr val="accent1"/>
-            </a:fillRef>
-            <a:effectRef idx="0">
-              <a:schemeClr val="accent1"/>
-            </a:effectRef>
-            <a:fontRef idx="minor">
-              <a:schemeClr val="lt1"/>
-            </a:fontRef>
-          </p:style>
-          <p:txBody>
-            <a:bodyPr wrap="square" rtlCol="0" anchor="ctr">
-              <a:noAutofit/>
-            </a:bodyPr>
-            <a:lstStyle/>
-            <a:p>
-              <a:pPr algn="ctr"/>
-              <a:endParaRPr lang="en-US" dirty="0"/>
-            </a:p>
-          </p:txBody>
-        </p:sp>
-        <p:grpSp>
-          <p:nvGrpSpPr>
-            <p:cNvPr id="9" name="Group 8">
-              <a:extLst>
-                <a:ext uri="{FF2B5EF4-FFF2-40B4-BE49-F238E27FC236}">
-                  <a16:creationId xmlns:a16="http://schemas.microsoft.com/office/drawing/2014/main" id="{9861BC34-DFBF-2D4F-B463-FCFBC08391FF}"/>
-                </a:ext>
-                <a:ext uri="{C183D7F6-B498-43B3-948B-1728B52AA6E4}">
-                  <adec:decorative xmlns:adec="http://schemas.microsoft.com/office/drawing/2017/decorative" val="1"/>
-                </a:ext>
-              </a:extLst>
-            </p:cNvPr>
-            <p:cNvGrpSpPr/>
-            <p:nvPr userDrawn="1"/>
-          </p:nvGrpSpPr>
-          <p:grpSpPr>
-            <a:xfrm>
-              <a:off x="8082092" y="5590903"/>
-              <a:ext cx="1572380" cy="1267097"/>
-              <a:chOff x="7413403" y="4976359"/>
-              <a:chExt cx="2334986" cy="1881641"/>
-            </a:xfrm>
-          </p:grpSpPr>
-          <p:sp>
-            <p:nvSpPr>
-              <p:cNvPr id="7" name="Freeform 6">
-                <a:extLst>
-                  <a:ext uri="{FF2B5EF4-FFF2-40B4-BE49-F238E27FC236}">
-                    <a16:creationId xmlns:a16="http://schemas.microsoft.com/office/drawing/2014/main" id="{55C37C19-F268-4A43-A0D4-3B1B38D48952}"/>
-                  </a:ext>
-                </a:extLst>
-              </p:cNvPr>
-              <p:cNvSpPr/>
-              <p:nvPr userDrawn="1"/>
-            </p:nvSpPr>
-            <p:spPr>
-              <a:xfrm rot="5400000" flipH="1" flipV="1">
-                <a:off x="8223822" y="5333433"/>
-                <a:ext cx="1881641" cy="1167493"/>
-              </a:xfrm>
-              <a:custGeom>
-                <a:avLst/>
-                <a:gdLst>
-                  <a:gd name="connsiteX0" fmla="*/ 1881641 w 1881641"/>
-                  <a:gd name="connsiteY0" fmla="*/ 1167473 h 1167493"/>
-                  <a:gd name="connsiteX1" fmla="*/ 1881641 w 1881641"/>
-                  <a:gd name="connsiteY1" fmla="*/ 1167493 h 1167493"/>
-                  <a:gd name="connsiteX2" fmla="*/ 1167493 w 1881641"/>
-                  <a:gd name="connsiteY2" fmla="*/ 1167493 h 1167493"/>
-                  <a:gd name="connsiteX3" fmla="*/ 0 w 1881641"/>
-                  <a:gd name="connsiteY3" fmla="*/ 0 h 1167493"/>
-                  <a:gd name="connsiteX4" fmla="*/ 714149 w 1881641"/>
-                  <a:gd name="connsiteY4" fmla="*/ 0 h 1167493"/>
-                  <a:gd name="connsiteX5" fmla="*/ 1875614 w 1881641"/>
-                  <a:gd name="connsiteY5" fmla="*/ 1048124 h 1167493"/>
-                  <a:gd name="connsiteX6" fmla="*/ 1881641 w 1881641"/>
-                  <a:gd name="connsiteY6" fmla="*/ 1167473 h 1167493"/>
-                </a:gdLst>
-                <a:ahLst/>
-                <a:cxnLst>
-                  <a:cxn ang="0">
-                    <a:pos x="connsiteX0" y="connsiteY0"/>
-                  </a:cxn>
-                  <a:cxn ang="0">
-                    <a:pos x="connsiteX1" y="connsiteY1"/>
-                  </a:cxn>
-                  <a:cxn ang="0">
-                    <a:pos x="connsiteX2" y="connsiteY2"/>
-                  </a:cxn>
-                  <a:cxn ang="0">
-                    <a:pos x="connsiteX3" y="connsiteY3"/>
-                  </a:cxn>
-                  <a:cxn ang="0">
-                    <a:pos x="connsiteX4" y="connsiteY4"/>
-                  </a:cxn>
-                  <a:cxn ang="0">
-                    <a:pos x="connsiteX5" y="connsiteY5"/>
-                  </a:cxn>
-                  <a:cxn ang="0">
-                    <a:pos x="connsiteX6" y="connsiteY6"/>
-                  </a:cxn>
-                </a:cxnLst>
-                <a:rect l="l" t="t" r="r" b="b"/>
-                <a:pathLst>
-                  <a:path w="1881641" h="1167493">
-                    <a:moveTo>
-                      <a:pt x="1881641" y="1167473"/>
-                    </a:moveTo>
-                    <a:lnTo>
-                      <a:pt x="1881641" y="1167493"/>
-                    </a:lnTo>
-                    <a:lnTo>
-                      <a:pt x="1167493" y="1167493"/>
-                    </a:lnTo>
-                    <a:cubicBezTo>
-                      <a:pt x="522704" y="1167493"/>
-                      <a:pt x="0" y="644789"/>
-                      <a:pt x="0" y="0"/>
-                    </a:cubicBezTo>
-                    <a:lnTo>
-                      <a:pt x="714149" y="0"/>
-                    </a:lnTo>
-                    <a:cubicBezTo>
-                      <a:pt x="1318639" y="0"/>
-                      <a:pt x="1815827" y="459408"/>
-                      <a:pt x="1875614" y="1048124"/>
-                    </a:cubicBezTo>
-                    <a:lnTo>
-                      <a:pt x="1881641" y="1167473"/>
-                    </a:lnTo>
-                    <a:close/>
-                  </a:path>
-                </a:pathLst>
-              </a:custGeom>
-              <a:solidFill>
-                <a:schemeClr val="accent1"/>
-              </a:solidFill>
-              <a:ln>
-                <a:noFill/>
-              </a:ln>
-            </p:spPr>
-            <p:style>
-              <a:lnRef idx="2">
-                <a:schemeClr val="accent1">
-                  <a:shade val="50000"/>
-                </a:schemeClr>
-              </a:lnRef>
-              <a:fillRef idx="1">
-                <a:schemeClr val="accent1"/>
-              </a:fillRef>
-              <a:effectRef idx="0">
-                <a:schemeClr val="accent1"/>
-              </a:effectRef>
-              <a:fontRef idx="minor">
-                <a:schemeClr val="lt1"/>
-              </a:fontRef>
-            </p:style>
-            <p:txBody>
-              <a:bodyPr wrap="square" rtlCol="0" anchor="ctr">
-                <a:noAutofit/>
-              </a:bodyPr>
-              <a:lstStyle/>
-              <a:p>
-                <a:pPr algn="ctr"/>
-                <a:endParaRPr lang="en-US" dirty="0">
-                  <a:latin typeface="+mn-lt"/>
-                </a:endParaRPr>
-              </a:p>
-            </p:txBody>
-          </p:sp>
-          <p:sp>
-            <p:nvSpPr>
-              <p:cNvPr id="8" name="Freeform 7">
-                <a:extLst>
-                  <a:ext uri="{FF2B5EF4-FFF2-40B4-BE49-F238E27FC236}">
-                    <a16:creationId xmlns:a16="http://schemas.microsoft.com/office/drawing/2014/main" id="{E4F760E5-9D5D-E44F-AEBF-20CA8DE87D11}"/>
-                  </a:ext>
-                </a:extLst>
-              </p:cNvPr>
-              <p:cNvSpPr/>
-              <p:nvPr userDrawn="1"/>
-            </p:nvSpPr>
-            <p:spPr>
-              <a:xfrm rot="16200000" flipV="1">
-                <a:off x="7056329" y="5333433"/>
-                <a:ext cx="1881641" cy="1167493"/>
-              </a:xfrm>
-              <a:custGeom>
-                <a:avLst/>
-                <a:gdLst>
-                  <a:gd name="connsiteX0" fmla="*/ 1881641 w 1881641"/>
-                  <a:gd name="connsiteY0" fmla="*/ 1167473 h 1167493"/>
-                  <a:gd name="connsiteX1" fmla="*/ 1881641 w 1881641"/>
-                  <a:gd name="connsiteY1" fmla="*/ 1167493 h 1167493"/>
-                  <a:gd name="connsiteX2" fmla="*/ 1167493 w 1881641"/>
-                  <a:gd name="connsiteY2" fmla="*/ 1167493 h 1167493"/>
-                  <a:gd name="connsiteX3" fmla="*/ 0 w 1881641"/>
-                  <a:gd name="connsiteY3" fmla="*/ 0 h 1167493"/>
-                  <a:gd name="connsiteX4" fmla="*/ 714149 w 1881641"/>
-                  <a:gd name="connsiteY4" fmla="*/ 0 h 1167493"/>
-                  <a:gd name="connsiteX5" fmla="*/ 1875614 w 1881641"/>
-                  <a:gd name="connsiteY5" fmla="*/ 1048124 h 1167493"/>
-                  <a:gd name="connsiteX6" fmla="*/ 1881641 w 1881641"/>
-                  <a:gd name="connsiteY6" fmla="*/ 1167473 h 1167493"/>
-                </a:gdLst>
-                <a:ahLst/>
-                <a:cxnLst>
-                  <a:cxn ang="0">
-                    <a:pos x="connsiteX0" y="connsiteY0"/>
-                  </a:cxn>
-                  <a:cxn ang="0">
-                    <a:pos x="connsiteX1" y="connsiteY1"/>
-                  </a:cxn>
-                  <a:cxn ang="0">
-                    <a:pos x="connsiteX2" y="connsiteY2"/>
-                  </a:cxn>
-                  <a:cxn ang="0">
-                    <a:pos x="connsiteX3" y="connsiteY3"/>
-                  </a:cxn>
-                  <a:cxn ang="0">
-                    <a:pos x="connsiteX4" y="connsiteY4"/>
-                  </a:cxn>
-                  <a:cxn ang="0">
-                    <a:pos x="connsiteX5" y="connsiteY5"/>
-                  </a:cxn>
-                  <a:cxn ang="0">
-                    <a:pos x="connsiteX6" y="connsiteY6"/>
-                  </a:cxn>
-                </a:cxnLst>
-                <a:rect l="l" t="t" r="r" b="b"/>
-                <a:pathLst>
-                  <a:path w="1881641" h="1167493">
-                    <a:moveTo>
-                      <a:pt x="1881641" y="1167473"/>
-                    </a:moveTo>
-                    <a:lnTo>
-                      <a:pt x="1881641" y="1167493"/>
-                    </a:lnTo>
-                    <a:lnTo>
-                      <a:pt x="1167493" y="1167493"/>
-                    </a:lnTo>
-                    <a:cubicBezTo>
-                      <a:pt x="522704" y="1167493"/>
-                      <a:pt x="0" y="644789"/>
-                      <a:pt x="0" y="0"/>
-                    </a:cubicBezTo>
-                    <a:lnTo>
-                      <a:pt x="714149" y="0"/>
-                    </a:lnTo>
-                    <a:cubicBezTo>
-                      <a:pt x="1318639" y="0"/>
-                      <a:pt x="1815827" y="459408"/>
-                      <a:pt x="1875614" y="1048124"/>
-                    </a:cubicBezTo>
-                    <a:lnTo>
-                      <a:pt x="1881641" y="1167473"/>
-                    </a:lnTo>
-                    <a:close/>
-                  </a:path>
-                </a:pathLst>
-              </a:custGeom>
-              <a:solidFill>
-                <a:schemeClr val="tx2"/>
-              </a:solidFill>
-              <a:ln>
-                <a:noFill/>
-              </a:ln>
-            </p:spPr>
-            <p:style>
-              <a:lnRef idx="2">
-                <a:schemeClr val="accent1">
-                  <a:shade val="50000"/>
-                </a:schemeClr>
-              </a:lnRef>
-              <a:fillRef idx="1">
-                <a:schemeClr val="accent1"/>
-              </a:fillRef>
-              <a:effectRef idx="0">
-                <a:schemeClr val="accent1"/>
-              </a:effectRef>
-              <a:fontRef idx="minor">
-                <a:schemeClr val="lt1"/>
-              </a:fontRef>
-            </p:style>
-            <p:txBody>
-              <a:bodyPr wrap="square" rtlCol="0" anchor="ctr">
-                <a:noAutofit/>
-              </a:bodyPr>
-              <a:lstStyle/>
-              <a:p>
-                <a:pPr algn="ctr"/>
-                <a:endParaRPr lang="en-US" dirty="0">
-                  <a:latin typeface="+mn-lt"/>
-                </a:endParaRPr>
-              </a:p>
-            </p:txBody>
-          </p:sp>
-        </p:grpSp>
-      </p:grpSp>
-      <p:sp>
-        <p:nvSpPr>
-          <p:cNvPr id="2" name="Title 1">
-            <a:extLst>
-              <a:ext uri="{FF2B5EF4-FFF2-40B4-BE49-F238E27FC236}">
-                <a16:creationId xmlns:a16="http://schemas.microsoft.com/office/drawing/2014/main" id="{3CD97974-B93C-4C96-B3F6-F69E3D6DE6CA}"/>
-              </a:ext>
-            </a:extLst>
-          </p:cNvPr>
-          <p:cNvSpPr>
-            <a:spLocks noGrp="1"/>
-          </p:cNvSpPr>
-          <p:nvPr>
-            <p:ph type="title" hasCustomPrompt="1"/>
-          </p:nvPr>
-        </p:nvSpPr>
-        <p:spPr>
-          <a:xfrm>
-            <a:off x="1167492" y="1371600"/>
-            <a:ext cx="5486400" cy="4114800"/>
-          </a:xfrm>
-        </p:spPr>
-        <p:txBody>
-          <a:bodyPr anchor="ctr" anchorCtr="0">
-            <a:noAutofit/>
-          </a:bodyPr>
-          <a:lstStyle>
-            <a:lvl1pPr>
-              <a:defRPr sz="6000" b="1">
-                <a:latin typeface="+mj-lt"/>
-              </a:defRPr>
-            </a:lvl1pPr>
-          </a:lstStyle>
-          <a:p>
-            <a:r>
-              <a:rPr lang="en-US" dirty="0"/>
-              <a:t>Click to add title</a:t>
-            </a:r>
-          </a:p>
-        </p:txBody>
-      </p:sp>
-      <p:sp>
-        <p:nvSpPr>
-          <p:cNvPr id="15" name="Picture Placeholder 14">
-            <a:extLst>
-              <a:ext uri="{FF2B5EF4-FFF2-40B4-BE49-F238E27FC236}">
-                <a16:creationId xmlns:a16="http://schemas.microsoft.com/office/drawing/2014/main" id="{3124234B-E1C4-2616-9993-A23142AA69B2}"/>
-              </a:ext>
-            </a:extLst>
-          </p:cNvPr>
-          <p:cNvSpPr>
-            <a:spLocks noGrp="1"/>
-          </p:cNvSpPr>
-          <p:nvPr>
-            <p:ph type="pic" sz="quarter" idx="10"/>
-          </p:nvPr>
-        </p:nvSpPr>
-        <p:spPr>
-          <a:xfrm>
-            <a:off x="7183438" y="1168400"/>
-            <a:ext cx="4500562" cy="4521200"/>
-          </a:xfrm>
-          <a:prstGeom prst="ellipse">
-            <a:avLst/>
-          </a:prstGeom>
-          <a:solidFill>
-            <a:schemeClr val="accent2"/>
-          </a:solidFill>
-        </p:spPr>
-        <p:txBody>
-          <a:bodyPr/>
-          <a:lstStyle>
-            <a:lvl1pPr marL="0" indent="0" algn="ctr">
-              <a:buNone/>
-              <a:defRPr sz="2000"/>
-            </a:lvl1pPr>
-          </a:lstStyle>
-          <a:p>
-            <a:r>
-              <a:rPr lang="en-US"/>
-              <a:t>Click icon to add picture</a:t>
-            </a:r>
-            <a:endParaRPr lang="en-US" dirty="0"/>
-          </a:p>
-        </p:txBody>
-      </p:sp>
-      <p:sp>
-        <p:nvSpPr>
-          <p:cNvPr id="10" name="Date Placeholder 3">
-            <a:extLst>
-              <a:ext uri="{FF2B5EF4-FFF2-40B4-BE49-F238E27FC236}">
-                <a16:creationId xmlns:a16="http://schemas.microsoft.com/office/drawing/2014/main" id="{7536C149-3EFE-A94E-902D-57CED00B2C0F}"/>
-              </a:ext>
-            </a:extLst>
-          </p:cNvPr>
-          <p:cNvSpPr>
-            <a:spLocks noGrp="1"/>
-          </p:cNvSpPr>
-          <p:nvPr>
-            <p:ph type="dt" sz="half" idx="2"/>
-          </p:nvPr>
-        </p:nvSpPr>
-        <p:spPr>
-          <a:xfrm>
-            <a:off x="381000" y="6356350"/>
-            <a:ext cx="2743200" cy="365125"/>
-          </a:xfrm>
-          <a:prstGeom prst="rect">
-            <a:avLst/>
-          </a:prstGeom>
-        </p:spPr>
-        <p:txBody>
-          <a:bodyPr vert="horz" lIns="91440" tIns="45720" rIns="91440" bIns="45720" rtlCol="0" anchor="ctr">
-            <a:noAutofit/>
-          </a:bodyPr>
-          <a:lstStyle>
-            <a:lvl1pPr algn="l">
-              <a:defRPr sz="1200">
-                <a:solidFill>
-                  <a:schemeClr val="accent3"/>
-                </a:solidFill>
-                <a:latin typeface="+mn-lt"/>
-              </a:defRPr>
-            </a:lvl1pPr>
-          </a:lstStyle>
-          <a:p>
-            <a:r>
-              <a:rPr lang="en-US" dirty="0"/>
-              <a:t>9/8/20XX</a:t>
-            </a:r>
-          </a:p>
-        </p:txBody>
-      </p:sp>
-      <p:sp>
-        <p:nvSpPr>
-          <p:cNvPr id="11" name="Footer Placeholder 4">
-            <a:extLst>
-              <a:ext uri="{FF2B5EF4-FFF2-40B4-BE49-F238E27FC236}">
-                <a16:creationId xmlns:a16="http://schemas.microsoft.com/office/drawing/2014/main" id="{53CA1E78-F17D-F34D-9F81-0DBF44F37894}"/>
-              </a:ext>
-            </a:extLst>
-          </p:cNvPr>
-          <p:cNvSpPr>
-            <a:spLocks noGrp="1"/>
-          </p:cNvSpPr>
-          <p:nvPr>
-            <p:ph type="ftr" sz="quarter" idx="3"/>
-          </p:nvPr>
-        </p:nvSpPr>
-        <p:spPr>
-          <a:xfrm>
-            <a:off x="4038600" y="6356350"/>
-            <a:ext cx="4114800" cy="365125"/>
-          </a:xfrm>
-          <a:prstGeom prst="rect">
-            <a:avLst/>
-          </a:prstGeom>
-        </p:spPr>
-        <p:txBody>
-          <a:bodyPr vert="horz" lIns="91440" tIns="45720" rIns="91440" bIns="45720" rtlCol="0" anchor="ctr">
-            <a:noAutofit/>
-          </a:bodyPr>
-          <a:lstStyle>
-            <a:lvl1pPr algn="ctr">
-              <a:defRPr sz="1200">
-                <a:solidFill>
-                  <a:schemeClr val="accent3"/>
-                </a:solidFill>
-                <a:latin typeface="+mn-lt"/>
-              </a:defRPr>
-            </a:lvl1pPr>
-          </a:lstStyle>
-          <a:p>
-            <a:endParaRPr lang="en-US" dirty="0"/>
-          </a:p>
-        </p:txBody>
-      </p:sp>
-      <p:sp>
-        <p:nvSpPr>
-          <p:cNvPr id="12" name="Slide Number Placeholder 5">
-            <a:extLst>
-              <a:ext uri="{FF2B5EF4-FFF2-40B4-BE49-F238E27FC236}">
-                <a16:creationId xmlns:a16="http://schemas.microsoft.com/office/drawing/2014/main" id="{1FE54918-A625-F64F-A42E-A427E9B2D489}"/>
-              </a:ext>
-            </a:extLst>
-          </p:cNvPr>
-          <p:cNvSpPr>
-            <a:spLocks noGrp="1"/>
-          </p:cNvSpPr>
-          <p:nvPr>
-            <p:ph type="sldNum" sz="quarter" idx="4"/>
-          </p:nvPr>
-        </p:nvSpPr>
-        <p:spPr>
-          <a:xfrm>
-            <a:off x="10153276" y="6356350"/>
-            <a:ext cx="1657723" cy="365125"/>
-          </a:xfrm>
-          <a:prstGeom prst="rect">
-            <a:avLst/>
-          </a:prstGeom>
-        </p:spPr>
-        <p:txBody>
-          <a:bodyPr vert="horz" lIns="91440" tIns="45720" rIns="91440" bIns="45720" rtlCol="0" anchor="ctr">
-            <a:noAutofit/>
-          </a:bodyPr>
-          <a:lstStyle>
-            <a:lvl1pPr algn="r">
-              <a:defRPr sz="1200">
-                <a:solidFill>
-                  <a:schemeClr val="accent2"/>
-                </a:solidFill>
-                <a:latin typeface="+mn-lt"/>
-              </a:defRPr>
-            </a:lvl1pPr>
-          </a:lstStyle>
-          <a:p>
-            <a:fld id="{294A09A9-5501-47C1-A89A-A340965A2BE2}" type="slidenum">
-              <a:rPr lang="en-US" smtClean="0"/>
-              <a:pPr/>
-              <a:t>‹#›</a:t>
-            </a:fld>
-            <a:endParaRPr lang="en-US" dirty="0"/>
-          </a:p>
-        </p:txBody>
-      </p:sp>
-    </p:spTree>
-    <p:extLst>
-      <p:ext uri="{BB962C8B-B14F-4D97-AF65-F5344CB8AC3E}">
-        <p14:creationId xmlns:p14="http://schemas.microsoft.com/office/powerpoint/2010/main" val="2491266794"/>
-      </p:ext>
-    </p:extLst>
-  </p:cSld>
-  <p:clrMapOvr>
-    <a:masterClrMapping/>
-  </p:clrMapOvr>
-</p:sldLayout>
-</file>
-
-<file path=ppt/slideLayouts/slideLayout4.xml><?xml version="1.0" encoding="utf-8"?>
 <p:sldLayout xmlns:a="http://schemas.openxmlformats.org/drawingml/2006/main" xmlns:r="http://schemas.openxmlformats.org/officeDocument/2006/relationships" xmlns:p="http://schemas.openxmlformats.org/presentationml/2006/main" preserve="1" userDrawn="1">
   <p:cSld name="Title and content 2">
     <p:bg>
@@ -5205,7 +4258,7 @@
 </p:sldLayout>
 </file>
 
-<file path=ppt/slideLayouts/slideLayout5.xml><?xml version="1.0" encoding="utf-8"?>
+<file path=ppt/slideLayouts/slideLayout4.xml><?xml version="1.0" encoding="utf-8"?>
 <p:sldLayout xmlns:a="http://schemas.openxmlformats.org/drawingml/2006/main" xmlns:r="http://schemas.openxmlformats.org/officeDocument/2006/relationships" xmlns:p="http://schemas.openxmlformats.org/presentationml/2006/main" type="title" preserve="1">
   <p:cSld name="Section title">
     <p:spTree>
@@ -5955,7 +5008,7 @@
 </p:sldLayout>
 </file>
 
-<file path=ppt/slideLayouts/slideLayout6.xml><?xml version="1.0" encoding="utf-8"?>
+<file path=ppt/slideLayouts/slideLayout5.xml><?xml version="1.0" encoding="utf-8"?>
 <p:sldLayout xmlns:a="http://schemas.openxmlformats.org/drawingml/2006/main" xmlns:r="http://schemas.openxmlformats.org/officeDocument/2006/relationships" xmlns:p="http://schemas.openxmlformats.org/presentationml/2006/main" preserve="1" userDrawn="1">
   <p:cSld name="Title and 2 Column Content">
     <p:spTree>
@@ -6992,7 +6045,7 @@
 </p:sldLayout>
 </file>
 
-<file path=ppt/slideLayouts/slideLayout7.xml><?xml version="1.0" encoding="utf-8"?>
+<file path=ppt/slideLayouts/slideLayout6.xml><?xml version="1.0" encoding="utf-8"?>
 <p:sldLayout xmlns:a="http://schemas.openxmlformats.org/drawingml/2006/main" xmlns:r="http://schemas.openxmlformats.org/officeDocument/2006/relationships" xmlns:p="http://schemas.openxmlformats.org/presentationml/2006/main" preserve="1" userDrawn="1">
   <p:cSld name="Title and 2 content">
     <p:bg>
@@ -7696,7 +6749,7 @@
 </p:sldLayout>
 </file>
 
-<file path=ppt/slideLayouts/slideLayout8.xml><?xml version="1.0" encoding="utf-8"?>
+<file path=ppt/slideLayouts/slideLayout7.xml><?xml version="1.0" encoding="utf-8"?>
 <p:sldLayout xmlns:a="http://schemas.openxmlformats.org/drawingml/2006/main" xmlns:r="http://schemas.openxmlformats.org/officeDocument/2006/relationships" xmlns:p="http://schemas.openxmlformats.org/presentationml/2006/main" type="obj" preserve="1">
   <p:cSld name="Chart ">
     <p:bg>
@@ -8284,7 +7337,7 @@
 </p:sldLayout>
 </file>
 
-<file path=ppt/slideLayouts/slideLayout9.xml><?xml version="1.0" encoding="utf-8"?>
+<file path=ppt/slideLayouts/slideLayout8.xml><?xml version="1.0" encoding="utf-8"?>
 <p:sldLayout xmlns:a="http://schemas.openxmlformats.org/drawingml/2006/main" xmlns:r="http://schemas.openxmlformats.org/officeDocument/2006/relationships" xmlns:p="http://schemas.openxmlformats.org/presentationml/2006/main" type="title" preserve="1">
   <p:cSld name="End Slide">
     <p:spTree>
@@ -9300,13 +8353,12 @@
   <p:sldLayoutIdLst>
     <p:sldLayoutId id="2147483649" r:id="rId1"/>
     <p:sldLayoutId id="2147483650" r:id="rId2"/>
-    <p:sldLayoutId id="2147483673" r:id="rId3"/>
-    <p:sldLayoutId id="2147483671" r:id="rId4"/>
-    <p:sldLayoutId id="2147483659" r:id="rId5"/>
-    <p:sldLayoutId id="2147483668" r:id="rId6"/>
-    <p:sldLayoutId id="2147483669" r:id="rId7"/>
-    <p:sldLayoutId id="2147483661" r:id="rId8"/>
-    <p:sldLayoutId id="2147483666" r:id="rId9"/>
+    <p:sldLayoutId id="2147483671" r:id="rId3"/>
+    <p:sldLayoutId id="2147483659" r:id="rId4"/>
+    <p:sldLayoutId id="2147483668" r:id="rId5"/>
+    <p:sldLayoutId id="2147483669" r:id="rId6"/>
+    <p:sldLayoutId id="2147483661" r:id="rId7"/>
+    <p:sldLayoutId id="2147483666" r:id="rId8"/>
   </p:sldLayoutIdLst>
   <p:hf sldNum="0" hdr="0" ftr="0" dt="0"/>
   <p:txStyles>
@@ -9786,6 +8838,354 @@
           <a:p>
             <a:r>
               <a:rPr lang="en-US" dirty="0"/>
+              <a:t>SOLID Principles</a:t>
+            </a:r>
+          </a:p>
+        </p:txBody>
+      </p:sp>
+      <p:sp>
+        <p:nvSpPr>
+          <p:cNvPr id="8" name="Rectangle 2">
+            <a:extLst>
+              <a:ext uri="{FF2B5EF4-FFF2-40B4-BE49-F238E27FC236}">
+                <a16:creationId xmlns:a16="http://schemas.microsoft.com/office/drawing/2014/main" id="{C18C8363-1151-CA2E-E25A-AAE513C9627F}"/>
+              </a:ext>
+            </a:extLst>
+          </p:cNvPr>
+          <p:cNvSpPr>
+            <a:spLocks noGrp="1" noChangeArrowheads="1"/>
+          </p:cNvSpPr>
+          <p:nvPr>
+            <p:ph idx="1"/>
+          </p:nvPr>
+        </p:nvSpPr>
+        <p:spPr bwMode="auto">
+          <a:xfrm>
+            <a:off x="1166813" y="2489815"/>
+            <a:ext cx="9353703" cy="2400657"/>
+          </a:xfrm>
+          <a:prstGeom prst="rect">
+            <a:avLst/>
+          </a:prstGeom>
+          <a:noFill/>
+          <a:ln>
+            <a:noFill/>
+          </a:ln>
+          <a:effectLst/>
+          <a:extLst>
+            <a:ext uri="{909E8E84-426E-40DD-AFC4-6F175D3DCCD1}">
+              <a14:hiddenFill xmlns:a14="http://schemas.microsoft.com/office/drawing/2010/main">
+                <a:solidFill>
+                  <a:schemeClr val="accent1"/>
+                </a:solidFill>
+              </a14:hiddenFill>
+            </a:ext>
+            <a:ext uri="{91240B29-F687-4F45-9708-019B960494DF}">
+              <a14:hiddenLine xmlns:a14="http://schemas.microsoft.com/office/drawing/2010/main" w="9525">
+                <a:solidFill>
+                  <a:schemeClr val="tx1"/>
+                </a:solidFill>
+                <a:miter lim="800000"/>
+                <a:headEnd/>
+                <a:tailEnd/>
+              </a14:hiddenLine>
+            </a:ext>
+            <a:ext uri="{AF507438-7753-43E0-B8FC-AC1667EBCBE1}">
+              <a14:hiddenEffects xmlns:a14="http://schemas.microsoft.com/office/drawing/2010/main">
+                <a:effectLst>
+                  <a:outerShdw dist="35921" dir="2700000" algn="ctr" rotWithShape="0">
+                    <a:schemeClr val="bg2"/>
+                  </a:outerShdw>
+                </a:effectLst>
+              </a14:hiddenEffects>
+            </a:ext>
+          </a:extLst>
+        </p:spPr>
+        <p:txBody>
+          <a:bodyPr vert="horz" wrap="square" lIns="91440" tIns="45720" rIns="91440" bIns="45720" numCol="1" anchor="ctr" anchorCtr="0" compatLnSpc="1">
+            <a:prstTxWarp prst="textNoShape">
+              <a:avLst/>
+            </a:prstTxWarp>
+            <a:spAutoFit/>
+          </a:bodyPr>
+          <a:lstStyle/>
+          <a:p>
+            <a:pPr marL="0" marR="0" lvl="0" indent="0" algn="l" defTabSz="914400" rtl="0" eaLnBrk="0" fontAlgn="base" latinLnBrk="0" hangingPunct="0">
+              <a:lnSpc>
+                <a:spcPct val="100000"/>
+              </a:lnSpc>
+              <a:spcBef>
+                <a:spcPct val="0"/>
+              </a:spcBef>
+              <a:spcAft>
+                <a:spcPct val="0"/>
+              </a:spcAft>
+              <a:buClrTx/>
+              <a:buSzTx/>
+              <a:buFontTx/>
+              <a:buNone/>
+              <a:tabLst/>
+            </a:pPr>
+            <a:r>
+              <a:rPr kumimoji="0" lang="en-US" altLang="en-US" sz="2500" b="0" i="0" u="none" strike="noStrike" cap="none" normalizeH="0" baseline="0" dirty="0">
+                <a:ln>
+                  <a:noFill/>
+                </a:ln>
+                <a:solidFill>
+                  <a:schemeClr val="tx1"/>
+                </a:solidFill>
+                <a:effectLst/>
+                <a:latin typeface="Arial" panose="020B0604020202020204" pitchFamily="34" charset="0"/>
+              </a:rPr>
+              <a:t>Applies all five SOLID principles for clean and maintainable code.</a:t>
+            </a:r>
+            <a:br>
+              <a:rPr kumimoji="0" lang="en-US" altLang="en-US" sz="2500" b="0" i="0" u="none" strike="noStrike" cap="none" normalizeH="0" baseline="0" dirty="0">
+                <a:ln>
+                  <a:noFill/>
+                </a:ln>
+                <a:solidFill>
+                  <a:schemeClr val="tx1"/>
+                </a:solidFill>
+                <a:effectLst/>
+                <a:latin typeface="Arial" panose="020B0604020202020204" pitchFamily="34" charset="0"/>
+              </a:rPr>
+            </a:br>
+            <a:r>
+              <a:rPr kumimoji="0" lang="en-US" altLang="en-US" sz="2500" b="0" i="0" u="none" strike="noStrike" cap="none" normalizeH="0" baseline="0" dirty="0">
+                <a:ln>
+                  <a:noFill/>
+                </a:ln>
+                <a:solidFill>
+                  <a:schemeClr val="tx1"/>
+                </a:solidFill>
+                <a:effectLst/>
+                <a:latin typeface="Arial" panose="020B0604020202020204" pitchFamily="34" charset="0"/>
+              </a:rPr>
+              <a:t>Example: </a:t>
+            </a:r>
+            <a:r>
+              <a:rPr kumimoji="0" lang="en-US" altLang="en-US" sz="2500" b="1" i="0" u="none" strike="noStrike" cap="none" normalizeH="0" baseline="0" dirty="0" err="1">
+                <a:ln>
+                  <a:noFill/>
+                </a:ln>
+                <a:solidFill>
+                  <a:schemeClr val="tx1"/>
+                </a:solidFill>
+                <a:effectLst/>
+                <a:latin typeface="Arial Unicode MS"/>
+              </a:rPr>
+              <a:t>AuthManager</a:t>
+            </a:r>
+            <a:r>
+              <a:rPr kumimoji="0" lang="en-US" altLang="en-US" sz="2500" b="0" i="0" u="none" strike="noStrike" cap="none" normalizeH="0" baseline="0" dirty="0">
+                <a:ln>
+                  <a:noFill/>
+                </a:ln>
+                <a:solidFill>
+                  <a:schemeClr val="tx1"/>
+                </a:solidFill>
+                <a:effectLst/>
+              </a:rPr>
+              <a:t> follows </a:t>
+            </a:r>
+            <a:r>
+              <a:rPr kumimoji="0" lang="en-US" altLang="en-US" sz="2500" b="1" i="0" u="none" strike="noStrike" cap="none" normalizeH="0" baseline="0" dirty="0">
+                <a:ln>
+                  <a:noFill/>
+                </a:ln>
+                <a:solidFill>
+                  <a:schemeClr val="tx1"/>
+                </a:solidFill>
+                <a:effectLst/>
+              </a:rPr>
+              <a:t>Single Responsibility</a:t>
+            </a:r>
+            <a:r>
+              <a:rPr kumimoji="0" lang="en-US" altLang="en-US" sz="2500" b="0" i="0" u="none" strike="noStrike" cap="none" normalizeH="0" baseline="0" dirty="0">
+                <a:ln>
+                  <a:noFill/>
+                </a:ln>
+                <a:solidFill>
+                  <a:schemeClr val="tx1"/>
+                </a:solidFill>
+                <a:effectLst/>
+              </a:rPr>
+              <a:t>, and </a:t>
+            </a:r>
+            <a:r>
+              <a:rPr kumimoji="0" lang="en-US" altLang="en-US" sz="2500" b="1" i="0" u="none" strike="noStrike" cap="none" normalizeH="0" baseline="0" dirty="0" err="1">
+                <a:ln>
+                  <a:noFill/>
+                </a:ln>
+                <a:solidFill>
+                  <a:schemeClr val="tx1"/>
+                </a:solidFill>
+                <a:effectLst/>
+                <a:latin typeface="Arial Unicode MS"/>
+              </a:rPr>
+              <a:t>IManager</a:t>
+            </a:r>
+            <a:r>
+              <a:rPr kumimoji="0" lang="en-US" altLang="en-US" sz="2500" b="0" i="0" u="none" strike="noStrike" cap="none" normalizeH="0" baseline="0" dirty="0">
+                <a:ln>
+                  <a:noFill/>
+                </a:ln>
+                <a:solidFill>
+                  <a:schemeClr val="tx1"/>
+                </a:solidFill>
+                <a:effectLst/>
+              </a:rPr>
+              <a:t> supports </a:t>
+            </a:r>
+            <a:r>
+              <a:rPr kumimoji="0" lang="en-US" altLang="en-US" sz="2500" b="1" i="0" u="none" strike="noStrike" cap="none" normalizeH="0" baseline="0" dirty="0">
+                <a:ln>
+                  <a:noFill/>
+                </a:ln>
+                <a:solidFill>
+                  <a:schemeClr val="tx1"/>
+                </a:solidFill>
+                <a:effectLst/>
+              </a:rPr>
+              <a:t>Interface Segregation</a:t>
+            </a:r>
+            <a:r>
+              <a:rPr kumimoji="0" lang="en-US" altLang="en-US" sz="2500" b="0" i="0" u="none" strike="noStrike" cap="none" normalizeH="0" baseline="0" dirty="0">
+                <a:ln>
+                  <a:noFill/>
+                </a:ln>
+                <a:solidFill>
+                  <a:schemeClr val="tx1"/>
+                </a:solidFill>
+                <a:effectLst/>
+              </a:rPr>
+              <a:t>.</a:t>
+            </a:r>
+            <a:br>
+              <a:rPr kumimoji="0" lang="en-US" altLang="en-US" sz="2500" b="0" i="0" u="none" strike="noStrike" cap="none" normalizeH="0" baseline="0" dirty="0">
+                <a:ln>
+                  <a:noFill/>
+                </a:ln>
+                <a:solidFill>
+                  <a:schemeClr val="tx1"/>
+                </a:solidFill>
+                <a:effectLst/>
+                <a:latin typeface="Arial" panose="020B0604020202020204" pitchFamily="34" charset="0"/>
+              </a:rPr>
+            </a:br>
+            <a:r>
+              <a:rPr kumimoji="0" lang="en-US" altLang="en-US" sz="2500" b="1" i="0" u="none" strike="noStrike" cap="none" normalizeH="0" baseline="0" dirty="0">
+                <a:ln>
+                  <a:noFill/>
+                </a:ln>
+                <a:solidFill>
+                  <a:schemeClr val="tx1"/>
+                </a:solidFill>
+                <a:effectLst/>
+                <a:latin typeface="Arial" panose="020B0604020202020204" pitchFamily="34" charset="0"/>
+              </a:rPr>
+              <a:t>Open/Closed principle </a:t>
+            </a:r>
+            <a:r>
+              <a:rPr kumimoji="0" lang="en-US" altLang="en-US" sz="2500" b="0" i="0" u="none" strike="noStrike" cap="none" normalizeH="0" baseline="0" dirty="0">
+                <a:ln>
+                  <a:noFill/>
+                </a:ln>
+                <a:solidFill>
+                  <a:schemeClr val="tx1"/>
+                </a:solidFill>
+                <a:effectLst/>
+                <a:latin typeface="Arial" panose="020B0604020202020204" pitchFamily="34" charset="0"/>
+              </a:rPr>
+              <a:t>is applied by extending without modifying existing classes.</a:t>
+            </a:r>
+            <a:br>
+              <a:rPr kumimoji="0" lang="en-US" altLang="en-US" sz="2500" b="0" i="0" u="none" strike="noStrike" cap="none" normalizeH="0" baseline="0" dirty="0">
+                <a:ln>
+                  <a:noFill/>
+                </a:ln>
+                <a:solidFill>
+                  <a:schemeClr val="tx1"/>
+                </a:solidFill>
+                <a:effectLst/>
+                <a:latin typeface="Arial" panose="020B0604020202020204" pitchFamily="34" charset="0"/>
+              </a:rPr>
+            </a:br>
+            <a:r>
+              <a:rPr kumimoji="0" lang="en-US" altLang="en-US" sz="2500" b="0" i="0" u="none" strike="noStrike" cap="none" normalizeH="0" baseline="0" dirty="0">
+                <a:ln>
+                  <a:noFill/>
+                </a:ln>
+                <a:solidFill>
+                  <a:schemeClr val="tx1"/>
+                </a:solidFill>
+                <a:effectLst/>
+                <a:latin typeface="Arial" panose="020B0604020202020204" pitchFamily="34" charset="0"/>
+              </a:rPr>
+              <a:t>Encourages modular, testable, and scalable design. </a:t>
+            </a:r>
+          </a:p>
+        </p:txBody>
+      </p:sp>
+    </p:spTree>
+    <p:extLst>
+      <p:ext uri="{BB962C8B-B14F-4D97-AF65-F5344CB8AC3E}">
+        <p14:creationId xmlns:p14="http://schemas.microsoft.com/office/powerpoint/2010/main" val="1265939620"/>
+      </p:ext>
+    </p:extLst>
+  </p:cSld>
+  <p:clrMapOvr>
+    <a:masterClrMapping/>
+  </p:clrMapOvr>
+</p:sld>
+</file>
+
+<file path=ppt/slides/slide11.xml><?xml version="1.0" encoding="utf-8"?>
+<p:sld xmlns:a="http://schemas.openxmlformats.org/drawingml/2006/main" xmlns:r="http://schemas.openxmlformats.org/officeDocument/2006/relationships" xmlns:p="http://schemas.openxmlformats.org/presentationml/2006/main">
+  <p:cSld>
+    <p:spTree>
+      <p:nvGrpSpPr>
+        <p:cNvPr id="1" name=""/>
+        <p:cNvGrpSpPr/>
+        <p:nvPr/>
+      </p:nvGrpSpPr>
+      <p:grpSpPr>
+        <a:xfrm>
+          <a:off x="0" y="0"/>
+          <a:ext cx="0" cy="0"/>
+          <a:chOff x="0" y="0"/>
+          <a:chExt cx="0" cy="0"/>
+        </a:xfrm>
+      </p:grpSpPr>
+      <p:sp>
+        <p:nvSpPr>
+          <p:cNvPr id="6" name="Title 5">
+            <a:extLst>
+              <a:ext uri="{FF2B5EF4-FFF2-40B4-BE49-F238E27FC236}">
+                <a16:creationId xmlns:a16="http://schemas.microsoft.com/office/drawing/2014/main" id="{EDF9E134-98AA-3ECE-E40A-180C85ACD7D5}"/>
+              </a:ext>
+            </a:extLst>
+          </p:cNvPr>
+          <p:cNvSpPr>
+            <a:spLocks noGrp="1"/>
+          </p:cNvSpPr>
+          <p:nvPr>
+            <p:ph type="title"/>
+          </p:nvPr>
+        </p:nvSpPr>
+        <p:spPr>
+          <a:xfrm>
+            <a:off x="1167492" y="136526"/>
+            <a:ext cx="9601200" cy="1653371"/>
+          </a:xfrm>
+        </p:spPr>
+        <p:txBody>
+          <a:bodyPr/>
+          <a:lstStyle/>
+          <a:p>
+            <a:r>
+              <a:rPr lang="en-US" dirty="0"/>
               <a:t>Design Patterns</a:t>
             </a:r>
           </a:p>
@@ -10155,7 +9555,7 @@
 </p:sld>
 </file>
 
-<file path=ppt/slides/slide11.xml><?xml version="1.0" encoding="utf-8"?>
+<file path=ppt/slides/slide12.xml><?xml version="1.0" encoding="utf-8"?>
 <p:sld xmlns:a="http://schemas.openxmlformats.org/drawingml/2006/main" xmlns:r="http://schemas.openxmlformats.org/officeDocument/2006/relationships" xmlns:p="http://schemas.openxmlformats.org/presentationml/2006/main">
   <p:cSld>
     <p:spTree>
@@ -10174,10 +9574,160 @@
       </p:grpSpPr>
       <p:sp>
         <p:nvSpPr>
-          <p:cNvPr id="6" name="Title 5">
+          <p:cNvPr id="2" name="Title 1">
             <a:extLst>
               <a:ext uri="{FF2B5EF4-FFF2-40B4-BE49-F238E27FC236}">
-                <a16:creationId xmlns:a16="http://schemas.microsoft.com/office/drawing/2014/main" id="{EDF9E134-98AA-3ECE-E40A-180C85ACD7D5}"/>
+                <a16:creationId xmlns:a16="http://schemas.microsoft.com/office/drawing/2014/main" id="{0B6CD689-6D4F-BB1A-A6F4-07BE1A603C95}"/>
+              </a:ext>
+            </a:extLst>
+          </p:cNvPr>
+          <p:cNvSpPr>
+            <a:spLocks noGrp="1"/>
+          </p:cNvSpPr>
+          <p:nvPr>
+            <p:ph type="ctrTitle"/>
+          </p:nvPr>
+        </p:nvSpPr>
+        <p:spPr>
+          <a:xfrm>
+            <a:off x="223520" y="232913"/>
+            <a:ext cx="10302240" cy="3830130"/>
+          </a:xfrm>
+        </p:spPr>
+        <p:txBody>
+          <a:bodyPr/>
+          <a:lstStyle/>
+          <a:p>
+            <a:r>
+              <a:rPr lang="en-US" dirty="0"/>
+              <a:t>Overview of the Application</a:t>
+            </a:r>
+          </a:p>
+        </p:txBody>
+      </p:sp>
+    </p:spTree>
+    <p:extLst>
+      <p:ext uri="{BB962C8B-B14F-4D97-AF65-F5344CB8AC3E}">
+        <p14:creationId xmlns:p14="http://schemas.microsoft.com/office/powerpoint/2010/main" val="2023152231"/>
+      </p:ext>
+    </p:extLst>
+  </p:cSld>
+  <p:clrMapOvr>
+    <a:masterClrMapping/>
+  </p:clrMapOvr>
+</p:sld>
+</file>
+
+<file path=ppt/slides/slide13.xml><?xml version="1.0" encoding="utf-8"?>
+<p:sld xmlns:a="http://schemas.openxmlformats.org/drawingml/2006/main" xmlns:r="http://schemas.openxmlformats.org/officeDocument/2006/relationships" xmlns:p="http://schemas.openxmlformats.org/presentationml/2006/main">
+  <p:cSld>
+    <p:spTree>
+      <p:nvGrpSpPr>
+        <p:cNvPr id="1" name=""/>
+        <p:cNvGrpSpPr/>
+        <p:nvPr/>
+      </p:nvGrpSpPr>
+      <p:grpSpPr>
+        <a:xfrm>
+          <a:off x="0" y="0"/>
+          <a:ext cx="0" cy="0"/>
+          <a:chOff x="0" y="0"/>
+          <a:chExt cx="0" cy="0"/>
+        </a:xfrm>
+      </p:grpSpPr>
+      <p:sp>
+        <p:nvSpPr>
+          <p:cNvPr id="2" name="Title 1">
+            <a:extLst>
+              <a:ext uri="{FF2B5EF4-FFF2-40B4-BE49-F238E27FC236}">
+                <a16:creationId xmlns:a16="http://schemas.microsoft.com/office/drawing/2014/main" id="{42296B85-1FDD-BA9C-02FA-FCBBD2C87150}"/>
+              </a:ext>
+            </a:extLst>
+          </p:cNvPr>
+          <p:cNvSpPr>
+            <a:spLocks noGrp="1"/>
+          </p:cNvSpPr>
+          <p:nvPr>
+            <p:ph type="title"/>
+          </p:nvPr>
+        </p:nvSpPr>
+        <p:spPr/>
+        <p:txBody>
+          <a:bodyPr/>
+          <a:lstStyle/>
+          <a:p>
+            <a:r>
+              <a:rPr lang="en-US" dirty="0"/>
+              <a:t>The application is made by C# and connecting to database</a:t>
+            </a:r>
+          </a:p>
+        </p:txBody>
+      </p:sp>
+      <p:pic>
+        <p:nvPicPr>
+          <p:cNvPr id="5" name="Content Placeholder 4">
+            <a:extLst>
+              <a:ext uri="{FF2B5EF4-FFF2-40B4-BE49-F238E27FC236}">
+                <a16:creationId xmlns:a16="http://schemas.microsoft.com/office/drawing/2014/main" id="{6A209F6D-AE96-3853-F675-8031621BF6F0}"/>
+              </a:ext>
+            </a:extLst>
+          </p:cNvPr>
+          <p:cNvPicPr>
+            <a:picLocks noGrp="1" noChangeAspect="1"/>
+          </p:cNvPicPr>
+          <p:nvPr>
+            <p:ph idx="1"/>
+          </p:nvPr>
+        </p:nvPicPr>
+        <p:blipFill>
+          <a:blip r:embed="rId2"/>
+          <a:stretch>
+            <a:fillRect/>
+          </a:stretch>
+        </p:blipFill>
+        <p:spPr>
+          <a:xfrm>
+            <a:off x="1523512" y="1793441"/>
+            <a:ext cx="8233552" cy="4942273"/>
+          </a:xfrm>
+        </p:spPr>
+      </p:pic>
+    </p:spTree>
+    <p:extLst>
+      <p:ext uri="{BB962C8B-B14F-4D97-AF65-F5344CB8AC3E}">
+        <p14:creationId xmlns:p14="http://schemas.microsoft.com/office/powerpoint/2010/main" val="4034286451"/>
+      </p:ext>
+    </p:extLst>
+  </p:cSld>
+  <p:clrMapOvr>
+    <a:masterClrMapping/>
+  </p:clrMapOvr>
+</p:sld>
+</file>
+
+<file path=ppt/slides/slide14.xml><?xml version="1.0" encoding="utf-8"?>
+<p:sld xmlns:a="http://schemas.openxmlformats.org/drawingml/2006/main" xmlns:r="http://schemas.openxmlformats.org/officeDocument/2006/relationships" xmlns:p="http://schemas.openxmlformats.org/presentationml/2006/main">
+  <p:cSld>
+    <p:spTree>
+      <p:nvGrpSpPr>
+        <p:cNvPr id="1" name=""/>
+        <p:cNvGrpSpPr/>
+        <p:nvPr/>
+      </p:nvGrpSpPr>
+      <p:grpSpPr>
+        <a:xfrm>
+          <a:off x="0" y="0"/>
+          <a:ext cx="0" cy="0"/>
+          <a:chOff x="0" y="0"/>
+          <a:chExt cx="0" cy="0"/>
+        </a:xfrm>
+      </p:grpSpPr>
+      <p:sp>
+        <p:nvSpPr>
+          <p:cNvPr id="10" name="Title 1">
+            <a:extLst>
+              <a:ext uri="{FF2B5EF4-FFF2-40B4-BE49-F238E27FC236}">
+                <a16:creationId xmlns:a16="http://schemas.microsoft.com/office/drawing/2014/main" id="{9FB4C0AE-FAED-29E0-1A76-D0EA32AE0895}"/>
               </a:ext>
             </a:extLst>
           </p:cNvPr>
@@ -10191,7 +9741,7 @@
         <p:spPr>
           <a:xfrm>
             <a:off x="1167492" y="136526"/>
-            <a:ext cx="9601200" cy="1653371"/>
+            <a:ext cx="9779183" cy="1570038"/>
           </a:xfrm>
         </p:spPr>
         <p:txBody>
@@ -10200,152 +9750,44 @@
           <a:p>
             <a:r>
               <a:rPr lang="en-US" dirty="0"/>
-              <a:t>Tools </a:t>
+              <a:t>Home Page &amp; Budgeting Page</a:t>
             </a:r>
           </a:p>
         </p:txBody>
       </p:sp>
-      <p:sp>
-        <p:nvSpPr>
-          <p:cNvPr id="3" name="Content Placeholder 2">
+      <p:pic>
+        <p:nvPicPr>
+          <p:cNvPr id="9" name="Content Placeholder 8">
             <a:extLst>
               <a:ext uri="{FF2B5EF4-FFF2-40B4-BE49-F238E27FC236}">
-                <a16:creationId xmlns:a16="http://schemas.microsoft.com/office/drawing/2014/main" id="{C932D3B2-9041-250A-B758-072CFA39DFB6}"/>
+                <a16:creationId xmlns:a16="http://schemas.microsoft.com/office/drawing/2014/main" id="{DBE3E360-3F44-47C2-8483-3233BF44B799}"/>
               </a:ext>
             </a:extLst>
           </p:cNvPr>
-          <p:cNvSpPr>
-            <a:spLocks noGrp="1" noChangeArrowheads="1"/>
-          </p:cNvSpPr>
+          <p:cNvPicPr>
+            <a:picLocks noGrp="1" noChangeAspect="1"/>
+          </p:cNvPicPr>
           <p:nvPr>
             <p:ph idx="1"/>
           </p:nvPr>
-        </p:nvSpPr>
-        <p:spPr bwMode="auto">
+        </p:nvPicPr>
+        <p:blipFill>
+          <a:blip r:embed="rId2"/>
+          <a:stretch>
+            <a:fillRect/>
+          </a:stretch>
+        </p:blipFill>
+        <p:spPr>
           <a:xfrm>
-            <a:off x="907871" y="2520574"/>
-            <a:ext cx="10376258" cy="1631216"/>
+            <a:off x="1380852" y="1872791"/>
+            <a:ext cx="8677548" cy="4848683"/>
           </a:xfrm>
-          <a:prstGeom prst="rect">
-            <a:avLst/>
-          </a:prstGeom>
-          <a:noFill/>
-          <a:ln>
-            <a:noFill/>
-          </a:ln>
-          <a:effectLst/>
-          <a:extLst>
-            <a:ext uri="{909E8E84-426E-40DD-AFC4-6F175D3DCCD1}">
-              <a14:hiddenFill xmlns:a14="http://schemas.microsoft.com/office/drawing/2010/main">
-                <a:solidFill>
-                  <a:schemeClr val="accent1"/>
-                </a:solidFill>
-              </a14:hiddenFill>
-            </a:ext>
-            <a:ext uri="{91240B29-F687-4F45-9708-019B960494DF}">
-              <a14:hiddenLine xmlns:a14="http://schemas.microsoft.com/office/drawing/2010/main" w="9525">
-                <a:solidFill>
-                  <a:schemeClr val="tx1"/>
-                </a:solidFill>
-                <a:miter lim="800000"/>
-                <a:headEnd/>
-                <a:tailEnd/>
-              </a14:hiddenLine>
-            </a:ext>
-            <a:ext uri="{AF507438-7753-43E0-B8FC-AC1667EBCBE1}">
-              <a14:hiddenEffects xmlns:a14="http://schemas.microsoft.com/office/drawing/2010/main">
-                <a:effectLst>
-                  <a:outerShdw dist="35921" dir="2700000" algn="ctr" rotWithShape="0">
-                    <a:schemeClr val="bg2"/>
-                  </a:outerShdw>
-                </a:effectLst>
-              </a14:hiddenEffects>
-            </a:ext>
-          </a:extLst>
         </p:spPr>
-        <p:txBody>
-          <a:bodyPr vert="horz" wrap="square" lIns="91440" tIns="45720" rIns="91440" bIns="45720" numCol="1" anchor="ctr" anchorCtr="0" compatLnSpc="1">
-            <a:prstTxWarp prst="textNoShape">
-              <a:avLst/>
-            </a:prstTxWarp>
-            <a:spAutoFit/>
-          </a:bodyPr>
-          <a:lstStyle/>
-          <a:p>
-            <a:pPr marL="0" marR="0" lvl="0" indent="0" algn="l" defTabSz="914400" rtl="0" eaLnBrk="0" fontAlgn="base" latinLnBrk="0" hangingPunct="0">
-              <a:lnSpc>
-                <a:spcPct val="100000"/>
-              </a:lnSpc>
-              <a:spcBef>
-                <a:spcPct val="0"/>
-              </a:spcBef>
-              <a:spcAft>
-                <a:spcPct val="0"/>
-              </a:spcAft>
-              <a:buClrTx/>
-              <a:buSzTx/>
-              <a:buFontTx/>
-              <a:buNone/>
-              <a:tabLst/>
-            </a:pPr>
-            <a:r>
-              <a:rPr lang="en-US" sz="2500" dirty="0"/>
-              <a:t>Used </a:t>
-            </a:r>
-            <a:r>
-              <a:rPr lang="en-US" sz="2500" b="1" dirty="0"/>
-              <a:t>Draw.io</a:t>
-            </a:r>
-            <a:r>
-              <a:rPr lang="en-US" sz="2500" dirty="0"/>
-              <a:t> and </a:t>
-            </a:r>
-            <a:r>
-              <a:rPr lang="en-US" sz="2500" b="1" dirty="0" err="1"/>
-              <a:t>PlantUML</a:t>
-            </a:r>
-            <a:r>
-              <a:rPr lang="en-US" sz="2500" dirty="0"/>
-              <a:t> for diagrams and modeling.</a:t>
-            </a:r>
-            <a:br>
-              <a:rPr lang="en-US" sz="2500" dirty="0"/>
-            </a:br>
-            <a:r>
-              <a:rPr lang="en-US" sz="2500" dirty="0"/>
-              <a:t>These tools ensure clear and professional visual documentation.</a:t>
-            </a:r>
-            <a:br>
-              <a:rPr lang="en-US" sz="2500" dirty="0"/>
-            </a:br>
-            <a:r>
-              <a:rPr lang="en-US" sz="2500" dirty="0"/>
-              <a:t>Support team collaboration and iterative design.</a:t>
-            </a:r>
-            <a:br>
-              <a:rPr lang="en-US" sz="2500" dirty="0"/>
-            </a:br>
-            <a:r>
-              <a:rPr lang="en-US" sz="2500" dirty="0"/>
-              <a:t>Helpful for maintaining a unified design standard throughout the project.</a:t>
-            </a:r>
-            <a:endParaRPr kumimoji="0" lang="en-US" altLang="en-US" sz="2500" b="0" i="0" u="none" strike="noStrike" cap="none" normalizeH="0" baseline="0" dirty="0">
-              <a:ln>
-                <a:noFill/>
-              </a:ln>
-              <a:solidFill>
-                <a:schemeClr val="tx1"/>
-              </a:solidFill>
-              <a:effectLst/>
-              <a:latin typeface="Arial" panose="020B0604020202020204" pitchFamily="34" charset="0"/>
-            </a:endParaRPr>
-          </a:p>
-        </p:txBody>
-      </p:sp>
+      </p:pic>
     </p:spTree>
     <p:extLst>
       <p:ext uri="{BB962C8B-B14F-4D97-AF65-F5344CB8AC3E}">
-        <p14:creationId xmlns:p14="http://schemas.microsoft.com/office/powerpoint/2010/main" val="1224352256"/>
+        <p14:creationId xmlns:p14="http://schemas.microsoft.com/office/powerpoint/2010/main" val="118318436"/>
       </p:ext>
     </p:extLst>
   </p:cSld>
@@ -10355,7 +9797,7 @@
 </p:sld>
 </file>
 
-<file path=ppt/slides/slide12.xml><?xml version="1.0" encoding="utf-8"?>
+<file path=ppt/slides/slide15.xml><?xml version="1.0" encoding="utf-8"?>
 <p:sld xmlns:a="http://schemas.openxmlformats.org/drawingml/2006/main" xmlns:r="http://schemas.openxmlformats.org/officeDocument/2006/relationships" xmlns:p="http://schemas.openxmlformats.org/presentationml/2006/main">
   <p:cSld>
     <p:spTree>
@@ -10418,7 +9860,7 @@
 </p:sld>
 </file>
 
-<file path=ppt/slides/slide13.xml><?xml version="1.0" encoding="utf-8"?>
+<file path=ppt/slides/slide16.xml><?xml version="1.0" encoding="utf-8"?>
 <p:sld xmlns:a="http://schemas.openxmlformats.org/drawingml/2006/main" xmlns:r="http://schemas.openxmlformats.org/officeDocument/2006/relationships" xmlns:p="http://schemas.openxmlformats.org/presentationml/2006/main">
   <p:cSld>
     <p:spTree>
@@ -10612,7 +10054,7 @@
 </p:sld>
 </file>
 
-<file path=ppt/slides/slide14.xml><?xml version="1.0" encoding="utf-8"?>
+<file path=ppt/slides/slide17.xml><?xml version="1.0" encoding="utf-8"?>
 <p:sld xmlns:a="http://schemas.openxmlformats.org/drawingml/2006/main" xmlns:r="http://schemas.openxmlformats.org/officeDocument/2006/relationships" xmlns:p="http://schemas.openxmlformats.org/presentationml/2006/main">
   <p:cSld>
     <p:spTree>
@@ -10732,7 +10174,7 @@
 </p:sld>
 </file>
 
-<file path=ppt/slides/slide15.xml><?xml version="1.0" encoding="utf-8"?>
+<file path=ppt/slides/slide18.xml><?xml version="1.0" encoding="utf-8"?>
 <p:sld xmlns:a="http://schemas.openxmlformats.org/drawingml/2006/main" xmlns:r="http://schemas.openxmlformats.org/officeDocument/2006/relationships" xmlns:p="http://schemas.openxmlformats.org/presentationml/2006/main">
   <p:cSld>
     <p:spTree>
@@ -10832,7 +10274,7 @@
 </p:sld>
 </file>
 
-<file path=ppt/slides/slide16.xml><?xml version="1.0" encoding="utf-8"?>
+<file path=ppt/slides/slide19.xml><?xml version="1.0" encoding="utf-8"?>
 <p:sld xmlns:a="http://schemas.openxmlformats.org/drawingml/2006/main" xmlns:r="http://schemas.openxmlformats.org/officeDocument/2006/relationships" xmlns:p="http://schemas.openxmlformats.org/presentationml/2006/main">
   <p:cSld>
     <p:spTree>
@@ -12649,17 +12091,30 @@
               <a:tabLst/>
             </a:pPr>
             <a:r>
+              <a:rPr lang="en-US" altLang="en-US" sz="1800" dirty="0">
+                <a:solidFill>
+                  <a:schemeClr val="bg1">
+                    <a:lumMod val="95000"/>
+                  </a:schemeClr>
+                </a:solidFill>
+                <a:latin typeface="Arial" panose="020B0604020202020204" pitchFamily="34" charset="0"/>
+              </a:rPr>
+              <a:t>Ill</a:t>
+            </a:r>
+            <a:r>
               <a:rPr kumimoji="0" lang="en-US" altLang="en-US" sz="1800" b="0" i="0" u="none" strike="noStrike" cap="none" normalizeH="0" baseline="0" dirty="0">
                 <a:ln>
                   <a:noFill/>
                 </a:ln>
                 <a:solidFill>
-                  <a:schemeClr val="tx1"/>
+                  <a:schemeClr val="bg1">
+                    <a:lumMod val="95000"/>
+                  </a:schemeClr>
                 </a:solidFill>
                 <a:effectLst/>
                 <a:latin typeface="Arial" panose="020B0604020202020204" pitchFamily="34" charset="0"/>
               </a:rPr>
-              <a:t>Illustrate interactions between system components for specific user stories.</a:t>
+              <a:t>ustrate interactions between system components for specific user stories.</a:t>
             </a:r>
             <a:br>
               <a:rPr kumimoji="0" lang="en-US" altLang="en-US" sz="1800" b="0" i="0" u="none" strike="noStrike" cap="none" normalizeH="0" baseline="0" dirty="0">
@@ -12667,7 +12122,9 @@
                   <a:noFill/>
                 </a:ln>
                 <a:solidFill>
-                  <a:schemeClr val="tx1"/>
+                  <a:schemeClr val="bg1">
+                    <a:lumMod val="95000"/>
+                  </a:schemeClr>
                 </a:solidFill>
                 <a:effectLst/>
                 <a:latin typeface="Arial" panose="020B0604020202020204" pitchFamily="34" charset="0"/>
@@ -12679,7 +12136,9 @@
                   <a:noFill/>
                 </a:ln>
                 <a:solidFill>
-                  <a:schemeClr val="tx1"/>
+                  <a:schemeClr val="bg1">
+                    <a:lumMod val="95000"/>
+                  </a:schemeClr>
                 </a:solidFill>
                 <a:effectLst/>
                 <a:latin typeface="Arial" panose="020B0604020202020204" pitchFamily="34" charset="0"/>
@@ -12692,7 +12151,9 @@
                   <a:noFill/>
                 </a:ln>
                 <a:solidFill>
-                  <a:schemeClr val="tx1"/>
+                  <a:schemeClr val="bg1">
+                    <a:lumMod val="95000"/>
+                  </a:schemeClr>
                 </a:solidFill>
                 <a:effectLst/>
                 <a:latin typeface="Arial" panose="020B0604020202020204" pitchFamily="34" charset="0"/>
@@ -12705,7 +12166,9 @@
                   <a:noFill/>
                 </a:ln>
                 <a:solidFill>
-                  <a:schemeClr val="tx1"/>
+                  <a:schemeClr val="bg1">
+                    <a:lumMod val="95000"/>
+                  </a:schemeClr>
                 </a:solidFill>
                 <a:effectLst/>
                 <a:latin typeface="Arial" panose="020B0604020202020204" pitchFamily="34" charset="0"/>
@@ -12718,7 +12181,9 @@
                   <a:noFill/>
                 </a:ln>
                 <a:solidFill>
-                  <a:schemeClr val="tx1"/>
+                  <a:schemeClr val="bg1">
+                    <a:lumMod val="95000"/>
+                  </a:schemeClr>
                 </a:solidFill>
                 <a:effectLst/>
                 <a:latin typeface="Arial" panose="020B0604020202020204" pitchFamily="34" charset="0"/>
@@ -12731,7 +12196,9 @@
                   <a:noFill/>
                 </a:ln>
                 <a:solidFill>
-                  <a:schemeClr val="tx1"/>
+                  <a:schemeClr val="bg1">
+                    <a:lumMod val="95000"/>
+                  </a:schemeClr>
                 </a:solidFill>
                 <a:effectLst/>
                 <a:latin typeface="Arial" panose="020B0604020202020204" pitchFamily="34" charset="0"/>
@@ -12744,7 +12211,9 @@
                   <a:noFill/>
                 </a:ln>
                 <a:solidFill>
-                  <a:schemeClr val="tx1"/>
+                  <a:schemeClr val="bg1">
+                    <a:lumMod val="95000"/>
+                  </a:schemeClr>
                 </a:solidFill>
                 <a:effectLst/>
                 <a:latin typeface="Arial" panose="020B0604020202020204" pitchFamily="34" charset="0"/>
@@ -12757,7 +12226,9 @@
                   <a:noFill/>
                 </a:ln>
                 <a:solidFill>
-                  <a:schemeClr val="tx1"/>
+                  <a:schemeClr val="bg1">
+                    <a:lumMod val="95000"/>
+                  </a:schemeClr>
                 </a:solidFill>
                 <a:effectLst/>
                 <a:latin typeface="Arial" panose="020B0604020202020204" pitchFamily="34" charset="0"/>
@@ -12770,7 +12241,9 @@
                   <a:noFill/>
                 </a:ln>
                 <a:solidFill>
-                  <a:schemeClr val="tx1"/>
+                  <a:schemeClr val="bg1">
+                    <a:lumMod val="95000"/>
+                  </a:schemeClr>
                 </a:solidFill>
                 <a:effectLst/>
                 <a:latin typeface="Arial" panose="020B0604020202020204" pitchFamily="34" charset="0"/>
@@ -12783,7 +12256,9 @@
                   <a:noFill/>
                 </a:ln>
                 <a:solidFill>
-                  <a:schemeClr val="tx1"/>
+                  <a:schemeClr val="bg1">
+                    <a:lumMod val="95000"/>
+                  </a:schemeClr>
                 </a:solidFill>
                 <a:effectLst/>
                 <a:latin typeface="Arial" panose="020B0604020202020204" pitchFamily="34" charset="0"/>
@@ -12796,7 +12271,9 @@
                   <a:noFill/>
                 </a:ln>
                 <a:solidFill>
-                  <a:schemeClr val="tx1"/>
+                  <a:schemeClr val="bg1">
+                    <a:lumMod val="95000"/>
+                  </a:schemeClr>
                 </a:solidFill>
                 <a:effectLst/>
                 <a:latin typeface="Arial" panose="020B0604020202020204" pitchFamily="34" charset="0"/>
@@ -12808,7 +12285,9 @@
                   <a:noFill/>
                 </a:ln>
                 <a:solidFill>
-                  <a:schemeClr val="tx1"/>
+                  <a:schemeClr val="bg1">
+                    <a:lumMod val="95000"/>
+                  </a:schemeClr>
                 </a:solidFill>
                 <a:effectLst/>
                 <a:latin typeface="Arial" panose="020B0604020202020204" pitchFamily="34" charset="0"/>
@@ -12821,7 +12300,9 @@
                   <a:noFill/>
                 </a:ln>
                 <a:solidFill>
-                  <a:schemeClr val="tx1"/>
+                  <a:schemeClr val="bg1">
+                    <a:lumMod val="95000"/>
+                  </a:schemeClr>
                 </a:solidFill>
                 <a:effectLst/>
                 <a:latin typeface="Arial Unicode MS"/>
@@ -12834,7 +12315,9 @@
                   <a:noFill/>
                 </a:ln>
                 <a:solidFill>
-                  <a:schemeClr val="tx1"/>
+                  <a:schemeClr val="bg1">
+                    <a:lumMod val="95000"/>
+                  </a:schemeClr>
                 </a:solidFill>
                 <a:effectLst/>
               </a:rPr>
@@ -12846,7 +12329,9 @@
                   <a:noFill/>
                 </a:ln>
                 <a:solidFill>
-                  <a:schemeClr val="tx1"/>
+                  <a:schemeClr val="bg1">
+                    <a:lumMod val="95000"/>
+                  </a:schemeClr>
                 </a:solidFill>
                 <a:effectLst/>
                 <a:latin typeface="Arial Unicode MS"/>
@@ -12859,7 +12344,9 @@
                   <a:noFill/>
                 </a:ln>
                 <a:solidFill>
-                  <a:schemeClr val="tx1"/>
+                  <a:schemeClr val="bg1">
+                    <a:lumMod val="95000"/>
+                  </a:schemeClr>
                 </a:solidFill>
                 <a:effectLst/>
               </a:rPr>
@@ -12871,7 +12358,9 @@
                   <a:noFill/>
                 </a:ln>
                 <a:solidFill>
-                  <a:schemeClr val="tx1"/>
+                  <a:schemeClr val="bg1">
+                    <a:lumMod val="95000"/>
+                  </a:schemeClr>
                 </a:solidFill>
                 <a:effectLst/>
                 <a:latin typeface="Arial" panose="020B0604020202020204" pitchFamily="34" charset="0"/>
@@ -12883,7 +12372,9 @@
                   <a:noFill/>
                 </a:ln>
                 <a:solidFill>
-                  <a:schemeClr val="tx1"/>
+                  <a:schemeClr val="bg1">
+                    <a:lumMod val="95000"/>
+                  </a:schemeClr>
                 </a:solidFill>
                 <a:effectLst/>
                 <a:latin typeface="Arial" panose="020B0604020202020204" pitchFamily="34" charset="0"/>
@@ -12911,7 +12402,9 @@
             <a:r>
               <a:rPr lang="en-US" altLang="en-US" sz="1800" dirty="0">
                 <a:solidFill>
-                  <a:schemeClr val="tx1"/>
+                  <a:schemeClr val="bg1">
+                    <a:lumMod val="95000"/>
+                  </a:schemeClr>
                 </a:solidFill>
                 <a:latin typeface="Arial" panose="020B0604020202020204" pitchFamily="34" charset="0"/>
               </a:rPr>
@@ -12922,7 +12415,9 @@
                 <a:noFill/>
               </a:ln>
               <a:solidFill>
-                <a:schemeClr val="tx1"/>
+                <a:schemeClr val="bg1">
+                  <a:lumMod val="95000"/>
+                </a:schemeClr>
               </a:solidFill>
               <a:effectLst/>
               <a:latin typeface="Arial" panose="020B0604020202020204" pitchFamily="34" charset="0"/>
@@ -12972,6 +12467,93 @@
 </file>
 
 <file path=ppt/slides/slide8.xml><?xml version="1.0" encoding="utf-8"?>
+<p:sld xmlns:a="http://schemas.openxmlformats.org/drawingml/2006/main" xmlns:r="http://schemas.openxmlformats.org/officeDocument/2006/relationships" xmlns:p="http://schemas.openxmlformats.org/presentationml/2006/main">
+  <p:cSld>
+    <p:spTree>
+      <p:nvGrpSpPr>
+        <p:cNvPr id="1" name=""/>
+        <p:cNvGrpSpPr/>
+        <p:nvPr/>
+      </p:nvGrpSpPr>
+      <p:grpSpPr>
+        <a:xfrm>
+          <a:off x="0" y="0"/>
+          <a:ext cx="0" cy="0"/>
+          <a:chOff x="0" y="0"/>
+          <a:chExt cx="0" cy="0"/>
+        </a:xfrm>
+      </p:grpSpPr>
+      <p:sp>
+        <p:nvSpPr>
+          <p:cNvPr id="2" name="Title 1">
+            <a:extLst>
+              <a:ext uri="{FF2B5EF4-FFF2-40B4-BE49-F238E27FC236}">
+                <a16:creationId xmlns:a16="http://schemas.microsoft.com/office/drawing/2014/main" id="{CA8A35A4-DCD3-0017-C9B6-494058E2009D}"/>
+              </a:ext>
+            </a:extLst>
+          </p:cNvPr>
+          <p:cNvSpPr>
+            <a:spLocks noGrp="1"/>
+          </p:cNvSpPr>
+          <p:nvPr>
+            <p:ph type="title"/>
+          </p:nvPr>
+        </p:nvSpPr>
+        <p:spPr/>
+        <p:txBody>
+          <a:bodyPr/>
+          <a:lstStyle/>
+          <a:p>
+            <a:r>
+              <a:rPr lang="en-US" dirty="0"/>
+              <a:t>User Story #3 - Tracking Income</a:t>
+            </a:r>
+          </a:p>
+        </p:txBody>
+      </p:sp>
+      <p:pic>
+        <p:nvPicPr>
+          <p:cNvPr id="4" name="Content Placeholder 4">
+            <a:extLst>
+              <a:ext uri="{FF2B5EF4-FFF2-40B4-BE49-F238E27FC236}">
+                <a16:creationId xmlns:a16="http://schemas.microsoft.com/office/drawing/2014/main" id="{07DF7CA4-14D2-D13F-D18D-C23123B1CFC4}"/>
+              </a:ext>
+            </a:extLst>
+          </p:cNvPr>
+          <p:cNvPicPr>
+            <a:picLocks noGrp="1" noChangeAspect="1"/>
+          </p:cNvPicPr>
+          <p:nvPr>
+            <p:ph idx="1"/>
+          </p:nvPr>
+        </p:nvPicPr>
+        <p:blipFill>
+          <a:blip r:embed="rId2"/>
+          <a:stretch>
+            <a:fillRect/>
+          </a:stretch>
+        </p:blipFill>
+        <p:spPr>
+          <a:xfrm>
+            <a:off x="1567749" y="2126840"/>
+            <a:ext cx="5615371" cy="4538805"/>
+          </a:xfrm>
+        </p:spPr>
+      </p:pic>
+    </p:spTree>
+    <p:extLst>
+      <p:ext uri="{BB962C8B-B14F-4D97-AF65-F5344CB8AC3E}">
+        <p14:creationId xmlns:p14="http://schemas.microsoft.com/office/powerpoint/2010/main" val="266967733"/>
+      </p:ext>
+    </p:extLst>
+  </p:cSld>
+  <p:clrMapOvr>
+    <a:masterClrMapping/>
+  </p:clrMapOvr>
+</p:sld>
+</file>
+
+<file path=ppt/slides/slide9.xml><?xml version="1.0" encoding="utf-8"?>
 <p:sld xmlns:a="http://schemas.openxmlformats.org/drawingml/2006/main" xmlns:r="http://schemas.openxmlformats.org/officeDocument/2006/relationships" xmlns:p="http://schemas.openxmlformats.org/presentationml/2006/main">
   <p:cSld>
     <p:spTree>
@@ -13127,354 +12709,6 @@
     <p:extLst>
       <p:ext uri="{BB962C8B-B14F-4D97-AF65-F5344CB8AC3E}">
         <p14:creationId xmlns:p14="http://schemas.microsoft.com/office/powerpoint/2010/main" val="776019389"/>
-      </p:ext>
-    </p:extLst>
-  </p:cSld>
-  <p:clrMapOvr>
-    <a:masterClrMapping/>
-  </p:clrMapOvr>
-</p:sld>
-</file>
-
-<file path=ppt/slides/slide9.xml><?xml version="1.0" encoding="utf-8"?>
-<p:sld xmlns:a="http://schemas.openxmlformats.org/drawingml/2006/main" xmlns:r="http://schemas.openxmlformats.org/officeDocument/2006/relationships" xmlns:p="http://schemas.openxmlformats.org/presentationml/2006/main">
-  <p:cSld>
-    <p:spTree>
-      <p:nvGrpSpPr>
-        <p:cNvPr id="1" name=""/>
-        <p:cNvGrpSpPr/>
-        <p:nvPr/>
-      </p:nvGrpSpPr>
-      <p:grpSpPr>
-        <a:xfrm>
-          <a:off x="0" y="0"/>
-          <a:ext cx="0" cy="0"/>
-          <a:chOff x="0" y="0"/>
-          <a:chExt cx="0" cy="0"/>
-        </a:xfrm>
-      </p:grpSpPr>
-      <p:sp>
-        <p:nvSpPr>
-          <p:cNvPr id="6" name="Title 5">
-            <a:extLst>
-              <a:ext uri="{FF2B5EF4-FFF2-40B4-BE49-F238E27FC236}">
-                <a16:creationId xmlns:a16="http://schemas.microsoft.com/office/drawing/2014/main" id="{EDF9E134-98AA-3ECE-E40A-180C85ACD7D5}"/>
-              </a:ext>
-            </a:extLst>
-          </p:cNvPr>
-          <p:cNvSpPr>
-            <a:spLocks noGrp="1"/>
-          </p:cNvSpPr>
-          <p:nvPr>
-            <p:ph type="title"/>
-          </p:nvPr>
-        </p:nvSpPr>
-        <p:spPr>
-          <a:xfrm>
-            <a:off x="1167492" y="136526"/>
-            <a:ext cx="9601200" cy="1653371"/>
-          </a:xfrm>
-        </p:spPr>
-        <p:txBody>
-          <a:bodyPr/>
-          <a:lstStyle/>
-          <a:p>
-            <a:r>
-              <a:rPr lang="en-US" dirty="0"/>
-              <a:t>SOLID Principles</a:t>
-            </a:r>
-          </a:p>
-        </p:txBody>
-      </p:sp>
-      <p:sp>
-        <p:nvSpPr>
-          <p:cNvPr id="8" name="Rectangle 2">
-            <a:extLst>
-              <a:ext uri="{FF2B5EF4-FFF2-40B4-BE49-F238E27FC236}">
-                <a16:creationId xmlns:a16="http://schemas.microsoft.com/office/drawing/2014/main" id="{C18C8363-1151-CA2E-E25A-AAE513C9627F}"/>
-              </a:ext>
-            </a:extLst>
-          </p:cNvPr>
-          <p:cNvSpPr>
-            <a:spLocks noGrp="1" noChangeArrowheads="1"/>
-          </p:cNvSpPr>
-          <p:nvPr>
-            <p:ph idx="1"/>
-          </p:nvPr>
-        </p:nvSpPr>
-        <p:spPr bwMode="auto">
-          <a:xfrm>
-            <a:off x="1166813" y="2489815"/>
-            <a:ext cx="9353703" cy="2400657"/>
-          </a:xfrm>
-          <a:prstGeom prst="rect">
-            <a:avLst/>
-          </a:prstGeom>
-          <a:noFill/>
-          <a:ln>
-            <a:noFill/>
-          </a:ln>
-          <a:effectLst/>
-          <a:extLst>
-            <a:ext uri="{909E8E84-426E-40DD-AFC4-6F175D3DCCD1}">
-              <a14:hiddenFill xmlns:a14="http://schemas.microsoft.com/office/drawing/2010/main">
-                <a:solidFill>
-                  <a:schemeClr val="accent1"/>
-                </a:solidFill>
-              </a14:hiddenFill>
-            </a:ext>
-            <a:ext uri="{91240B29-F687-4F45-9708-019B960494DF}">
-              <a14:hiddenLine xmlns:a14="http://schemas.microsoft.com/office/drawing/2010/main" w="9525">
-                <a:solidFill>
-                  <a:schemeClr val="tx1"/>
-                </a:solidFill>
-                <a:miter lim="800000"/>
-                <a:headEnd/>
-                <a:tailEnd/>
-              </a14:hiddenLine>
-            </a:ext>
-            <a:ext uri="{AF507438-7753-43E0-B8FC-AC1667EBCBE1}">
-              <a14:hiddenEffects xmlns:a14="http://schemas.microsoft.com/office/drawing/2010/main">
-                <a:effectLst>
-                  <a:outerShdw dist="35921" dir="2700000" algn="ctr" rotWithShape="0">
-                    <a:schemeClr val="bg2"/>
-                  </a:outerShdw>
-                </a:effectLst>
-              </a14:hiddenEffects>
-            </a:ext>
-          </a:extLst>
-        </p:spPr>
-        <p:txBody>
-          <a:bodyPr vert="horz" wrap="square" lIns="91440" tIns="45720" rIns="91440" bIns="45720" numCol="1" anchor="ctr" anchorCtr="0" compatLnSpc="1">
-            <a:prstTxWarp prst="textNoShape">
-              <a:avLst/>
-            </a:prstTxWarp>
-            <a:spAutoFit/>
-          </a:bodyPr>
-          <a:lstStyle/>
-          <a:p>
-            <a:pPr marL="0" marR="0" lvl="0" indent="0" algn="l" defTabSz="914400" rtl="0" eaLnBrk="0" fontAlgn="base" latinLnBrk="0" hangingPunct="0">
-              <a:lnSpc>
-                <a:spcPct val="100000"/>
-              </a:lnSpc>
-              <a:spcBef>
-                <a:spcPct val="0"/>
-              </a:spcBef>
-              <a:spcAft>
-                <a:spcPct val="0"/>
-              </a:spcAft>
-              <a:buClrTx/>
-              <a:buSzTx/>
-              <a:buFontTx/>
-              <a:buNone/>
-              <a:tabLst/>
-            </a:pPr>
-            <a:r>
-              <a:rPr kumimoji="0" lang="en-US" altLang="en-US" sz="2500" b="0" i="0" u="none" strike="noStrike" cap="none" normalizeH="0" baseline="0" dirty="0">
-                <a:ln>
-                  <a:noFill/>
-                </a:ln>
-                <a:solidFill>
-                  <a:schemeClr val="tx1"/>
-                </a:solidFill>
-                <a:effectLst/>
-                <a:latin typeface="Arial" panose="020B0604020202020204" pitchFamily="34" charset="0"/>
-              </a:rPr>
-              <a:t>Applies all five SOLID principles for clean and maintainable code.</a:t>
-            </a:r>
-            <a:br>
-              <a:rPr kumimoji="0" lang="en-US" altLang="en-US" sz="2500" b="0" i="0" u="none" strike="noStrike" cap="none" normalizeH="0" baseline="0" dirty="0">
-                <a:ln>
-                  <a:noFill/>
-                </a:ln>
-                <a:solidFill>
-                  <a:schemeClr val="tx1"/>
-                </a:solidFill>
-                <a:effectLst/>
-                <a:latin typeface="Arial" panose="020B0604020202020204" pitchFamily="34" charset="0"/>
-              </a:rPr>
-            </a:br>
-            <a:r>
-              <a:rPr kumimoji="0" lang="en-US" altLang="en-US" sz="2500" b="0" i="0" u="none" strike="noStrike" cap="none" normalizeH="0" baseline="0" dirty="0">
-                <a:ln>
-                  <a:noFill/>
-                </a:ln>
-                <a:solidFill>
-                  <a:schemeClr val="tx1"/>
-                </a:solidFill>
-                <a:effectLst/>
-                <a:latin typeface="Arial" panose="020B0604020202020204" pitchFamily="34" charset="0"/>
-              </a:rPr>
-              <a:t>Example: </a:t>
-            </a:r>
-            <a:r>
-              <a:rPr kumimoji="0" lang="en-US" altLang="en-US" sz="2500" b="1" i="0" u="none" strike="noStrike" cap="none" normalizeH="0" baseline="0" dirty="0" err="1">
-                <a:ln>
-                  <a:noFill/>
-                </a:ln>
-                <a:solidFill>
-                  <a:schemeClr val="tx1"/>
-                </a:solidFill>
-                <a:effectLst/>
-                <a:latin typeface="Arial Unicode MS"/>
-              </a:rPr>
-              <a:t>AuthManager</a:t>
-            </a:r>
-            <a:r>
-              <a:rPr kumimoji="0" lang="en-US" altLang="en-US" sz="2500" b="0" i="0" u="none" strike="noStrike" cap="none" normalizeH="0" baseline="0" dirty="0">
-                <a:ln>
-                  <a:noFill/>
-                </a:ln>
-                <a:solidFill>
-                  <a:schemeClr val="tx1"/>
-                </a:solidFill>
-                <a:effectLst/>
-              </a:rPr>
-              <a:t> follows </a:t>
-            </a:r>
-            <a:r>
-              <a:rPr kumimoji="0" lang="en-US" altLang="en-US" sz="2500" b="1" i="0" u="none" strike="noStrike" cap="none" normalizeH="0" baseline="0" dirty="0">
-                <a:ln>
-                  <a:noFill/>
-                </a:ln>
-                <a:solidFill>
-                  <a:schemeClr val="tx1"/>
-                </a:solidFill>
-                <a:effectLst/>
-              </a:rPr>
-              <a:t>Single Responsibility</a:t>
-            </a:r>
-            <a:r>
-              <a:rPr kumimoji="0" lang="en-US" altLang="en-US" sz="2500" b="0" i="0" u="none" strike="noStrike" cap="none" normalizeH="0" baseline="0" dirty="0">
-                <a:ln>
-                  <a:noFill/>
-                </a:ln>
-                <a:solidFill>
-                  <a:schemeClr val="tx1"/>
-                </a:solidFill>
-                <a:effectLst/>
-              </a:rPr>
-              <a:t>, and </a:t>
-            </a:r>
-            <a:r>
-              <a:rPr kumimoji="0" lang="en-US" altLang="en-US" sz="2500" b="1" i="0" u="none" strike="noStrike" cap="none" normalizeH="0" baseline="0" dirty="0" err="1">
-                <a:ln>
-                  <a:noFill/>
-                </a:ln>
-                <a:solidFill>
-                  <a:schemeClr val="tx1"/>
-                </a:solidFill>
-                <a:effectLst/>
-                <a:latin typeface="Arial Unicode MS"/>
-              </a:rPr>
-              <a:t>IManager</a:t>
-            </a:r>
-            <a:r>
-              <a:rPr kumimoji="0" lang="en-US" altLang="en-US" sz="2500" b="0" i="0" u="none" strike="noStrike" cap="none" normalizeH="0" baseline="0" dirty="0">
-                <a:ln>
-                  <a:noFill/>
-                </a:ln>
-                <a:solidFill>
-                  <a:schemeClr val="tx1"/>
-                </a:solidFill>
-                <a:effectLst/>
-              </a:rPr>
-              <a:t> supports </a:t>
-            </a:r>
-            <a:r>
-              <a:rPr kumimoji="0" lang="en-US" altLang="en-US" sz="2500" b="1" i="0" u="none" strike="noStrike" cap="none" normalizeH="0" baseline="0" dirty="0">
-                <a:ln>
-                  <a:noFill/>
-                </a:ln>
-                <a:solidFill>
-                  <a:schemeClr val="tx1"/>
-                </a:solidFill>
-                <a:effectLst/>
-              </a:rPr>
-              <a:t>Interface Segregation</a:t>
-            </a:r>
-            <a:r>
-              <a:rPr kumimoji="0" lang="en-US" altLang="en-US" sz="2500" b="0" i="0" u="none" strike="noStrike" cap="none" normalizeH="0" baseline="0" dirty="0">
-                <a:ln>
-                  <a:noFill/>
-                </a:ln>
-                <a:solidFill>
-                  <a:schemeClr val="tx1"/>
-                </a:solidFill>
-                <a:effectLst/>
-              </a:rPr>
-              <a:t>.</a:t>
-            </a:r>
-            <a:br>
-              <a:rPr kumimoji="0" lang="en-US" altLang="en-US" sz="2500" b="0" i="0" u="none" strike="noStrike" cap="none" normalizeH="0" baseline="0" dirty="0">
-                <a:ln>
-                  <a:noFill/>
-                </a:ln>
-                <a:solidFill>
-                  <a:schemeClr val="tx1"/>
-                </a:solidFill>
-                <a:effectLst/>
-                <a:latin typeface="Arial" panose="020B0604020202020204" pitchFamily="34" charset="0"/>
-              </a:rPr>
-            </a:br>
-            <a:r>
-              <a:rPr kumimoji="0" lang="en-US" altLang="en-US" sz="2500" b="1" i="0" u="none" strike="noStrike" cap="none" normalizeH="0" baseline="0" dirty="0">
-                <a:ln>
-                  <a:noFill/>
-                </a:ln>
-                <a:solidFill>
-                  <a:schemeClr val="tx1"/>
-                </a:solidFill>
-                <a:effectLst/>
-                <a:latin typeface="Arial" panose="020B0604020202020204" pitchFamily="34" charset="0"/>
-              </a:rPr>
-              <a:t>Open/Closed principle </a:t>
-            </a:r>
-            <a:r>
-              <a:rPr kumimoji="0" lang="en-US" altLang="en-US" sz="2500" b="0" i="0" u="none" strike="noStrike" cap="none" normalizeH="0" baseline="0" dirty="0">
-                <a:ln>
-                  <a:noFill/>
-                </a:ln>
-                <a:solidFill>
-                  <a:schemeClr val="tx1"/>
-                </a:solidFill>
-                <a:effectLst/>
-                <a:latin typeface="Arial" panose="020B0604020202020204" pitchFamily="34" charset="0"/>
-              </a:rPr>
-              <a:t>is applied by extending without modifying existing classes.</a:t>
-            </a:r>
-            <a:br>
-              <a:rPr kumimoji="0" lang="en-US" altLang="en-US" sz="2500" b="0" i="0" u="none" strike="noStrike" cap="none" normalizeH="0" baseline="0" dirty="0">
-                <a:ln>
-                  <a:noFill/>
-                </a:ln>
-                <a:solidFill>
-                  <a:schemeClr val="tx1"/>
-                </a:solidFill>
-                <a:effectLst/>
-                <a:latin typeface="Arial" panose="020B0604020202020204" pitchFamily="34" charset="0"/>
-              </a:rPr>
-            </a:br>
-            <a:r>
-              <a:rPr kumimoji="0" lang="en-US" altLang="en-US" sz="2500" b="0" i="0" u="none" strike="noStrike" cap="none" normalizeH="0" baseline="0" dirty="0">
-                <a:ln>
-                  <a:noFill/>
-                </a:ln>
-                <a:solidFill>
-                  <a:schemeClr val="tx1"/>
-                </a:solidFill>
-                <a:effectLst/>
-                <a:latin typeface="Arial" panose="020B0604020202020204" pitchFamily="34" charset="0"/>
-              </a:rPr>
-              <a:t>Encourages modular, testable, and scalable design. </a:t>
-            </a:r>
-          </a:p>
-        </p:txBody>
-      </p:sp>
-    </p:spTree>
-    <p:extLst>
-      <p:ext uri="{BB962C8B-B14F-4D97-AF65-F5344CB8AC3E}">
-        <p14:creationId xmlns:p14="http://schemas.microsoft.com/office/powerpoint/2010/main" val="1265939620"/>
       </p:ext>
     </p:extLst>
   </p:cSld>
@@ -14276,23 +13510,12 @@
 </file>
 
 <file path=customXml/item1.xml><?xml version="1.0" encoding="utf-8"?>
-<p:properties xmlns:p="http://schemas.microsoft.com/office/2006/metadata/properties" xmlns:xsi="http://www.w3.org/2001/XMLSchema-instance" xmlns:pc="http://schemas.microsoft.com/office/infopath/2007/PartnerControls">
-  <documentManagement>
-    <_ip_UnifiedCompliancePolicyUIAction xmlns="http://schemas.microsoft.com/sharepoint/v3" xsi:nil="true"/>
-    <Image xmlns="71af3243-3dd4-4a8d-8c0d-dd76da1f02a5">
-      <Url xsi:nil="true"/>
-      <Description xsi:nil="true"/>
-    </Image>
-    <Status xmlns="71af3243-3dd4-4a8d-8c0d-dd76da1f02a5">Not started</Status>
-    <Background xmlns="71af3243-3dd4-4a8d-8c0d-dd76da1f02a5">false</Background>
-    <_ip_UnifiedCompliancePolicyProperties xmlns="http://schemas.microsoft.com/sharepoint/v3" xsi:nil="true"/>
-    <ImageTagsTaxHTField xmlns="71af3243-3dd4-4a8d-8c0d-dd76da1f02a5">
-      <Terms xmlns="http://schemas.microsoft.com/office/infopath/2007/PartnerControls"/>
-    </ImageTagsTaxHTField>
-    <TaxCatchAll xmlns="230e9df3-be65-4c73-a93b-d1236ebd677e" xsi:nil="true"/>
-    <MediaServiceKeyPoints xmlns="71af3243-3dd4-4a8d-8c0d-dd76da1f02a5" xsi:nil="true"/>
-  </documentManagement>
-</p:properties>
+<?mso-contentType ?>
+<FormTemplates xmlns="http://schemas.microsoft.com/sharepoint/v3/contenttype/forms">
+  <Display>DocumentLibraryForm</Display>
+  <Edit>DocumentLibraryForm</Edit>
+  <New>DocumentLibraryForm</New>
+</FormTemplates>
 </file>
 
 <file path=customXml/item2.xml><?xml version="1.0" encoding="utf-8"?>
@@ -14608,22 +13831,29 @@
 </file>
 
 <file path=customXml/item3.xml><?xml version="1.0" encoding="utf-8"?>
-<?mso-contentType ?>
-<FormTemplates xmlns="http://schemas.microsoft.com/sharepoint/v3/contenttype/forms">
-  <Display>DocumentLibraryForm</Display>
-  <Edit>DocumentLibraryForm</Edit>
-  <New>DocumentLibraryForm</New>
-</FormTemplates>
+<p:properties xmlns:p="http://schemas.microsoft.com/office/2006/metadata/properties" xmlns:xsi="http://www.w3.org/2001/XMLSchema-instance" xmlns:pc="http://schemas.microsoft.com/office/infopath/2007/PartnerControls">
+  <documentManagement>
+    <_ip_UnifiedCompliancePolicyUIAction xmlns="http://schemas.microsoft.com/sharepoint/v3" xsi:nil="true"/>
+    <Image xmlns="71af3243-3dd4-4a8d-8c0d-dd76da1f02a5">
+      <Url xsi:nil="true"/>
+      <Description xsi:nil="true"/>
+    </Image>
+    <Status xmlns="71af3243-3dd4-4a8d-8c0d-dd76da1f02a5">Not started</Status>
+    <Background xmlns="71af3243-3dd4-4a8d-8c0d-dd76da1f02a5">false</Background>
+    <_ip_UnifiedCompliancePolicyProperties xmlns="http://schemas.microsoft.com/sharepoint/v3" xsi:nil="true"/>
+    <ImageTagsTaxHTField xmlns="71af3243-3dd4-4a8d-8c0d-dd76da1f02a5">
+      <Terms xmlns="http://schemas.microsoft.com/office/infopath/2007/PartnerControls"/>
+    </ImageTagsTaxHTField>
+    <TaxCatchAll xmlns="230e9df3-be65-4c73-a93b-d1236ebd677e" xsi:nil="true"/>
+    <MediaServiceKeyPoints xmlns="71af3243-3dd4-4a8d-8c0d-dd76da1f02a5" xsi:nil="true"/>
+  </documentManagement>
+</p:properties>
 </file>
 
 <file path=customXml/itemProps1.xml><?xml version="1.0" encoding="utf-8"?>
-<ds:datastoreItem xmlns:ds="http://schemas.openxmlformats.org/officeDocument/2006/customXml" ds:itemID="{61E98C35-9ECE-4425-BCBA-00E118C705CE}">
+<ds:datastoreItem xmlns:ds="http://schemas.openxmlformats.org/officeDocument/2006/customXml" ds:itemID="{45A8381C-73EB-48EA-B45F-7B7C8C7DF409}">
   <ds:schemaRefs>
-    <ds:schemaRef ds:uri="http://schemas.microsoft.com/office/2006/metadata/properties"/>
-    <ds:schemaRef ds:uri="http://schemas.microsoft.com/office/infopath/2007/PartnerControls"/>
-    <ds:schemaRef ds:uri="http://schemas.microsoft.com/sharepoint/v3"/>
-    <ds:schemaRef ds:uri="71af3243-3dd4-4a8d-8c0d-dd76da1f02a5"/>
-    <ds:schemaRef ds:uri="230e9df3-be65-4c73-a93b-d1236ebd677e"/>
+    <ds:schemaRef ds:uri="http://schemas.microsoft.com/sharepoint/v3/contenttype/forms"/>
   </ds:schemaRefs>
 </ds:datastoreItem>
 </file>
@@ -14650,9 +13880,13 @@
 </file>
 
 <file path=customXml/itemProps3.xml><?xml version="1.0" encoding="utf-8"?>
-<ds:datastoreItem xmlns:ds="http://schemas.openxmlformats.org/officeDocument/2006/customXml" ds:itemID="{45A8381C-73EB-48EA-B45F-7B7C8C7DF409}">
+<ds:datastoreItem xmlns:ds="http://schemas.openxmlformats.org/officeDocument/2006/customXml" ds:itemID="{61E98C35-9ECE-4425-BCBA-00E118C705CE}">
   <ds:schemaRefs>
-    <ds:schemaRef ds:uri="http://schemas.microsoft.com/sharepoint/v3/contenttype/forms"/>
+    <ds:schemaRef ds:uri="http://schemas.microsoft.com/office/2006/metadata/properties"/>
+    <ds:schemaRef ds:uri="http://schemas.microsoft.com/office/infopath/2007/PartnerControls"/>
+    <ds:schemaRef ds:uri="http://schemas.microsoft.com/sharepoint/v3"/>
+    <ds:schemaRef ds:uri="71af3243-3dd4-4a8d-8c0d-dd76da1f02a5"/>
+    <ds:schemaRef ds:uri="230e9df3-be65-4c73-a93b-d1236ebd677e"/>
   </ds:schemaRefs>
 </ds:datastoreItem>
 </file>
